--- a/Amazon price tracking service/Amazon_Price_Tracking_Service.pptx
+++ b/Amazon price tracking service/Amazon_Price_Tracking_Service.pptx
@@ -4530,7 +4530,7 @@
                 <a:latin typeface="PingFang TC"/>
                 <a:ea typeface="PingFang TC"/>
               </a:rPr>
-              <a:t>如何有效率地處理價格變動並通知訂閱者？— cron 全表掃 → event-driven</a:t>
+              <a:t>處理價格變動並通知：cron 全表掃 → event-driven</a:t>
             </a:r>
           </a:p>
         </p:txBody>
@@ -5783,7 +5783,7 @@
                 <a:latin typeface="PingFang TC"/>
                 <a:ea typeface="PingFang TC"/>
               </a:rPr>
-              <a:t>價格事件怎麼產生？CDC（log-based）vs dual-write（附錄 A）</a:t>
+              <a:t>價格事件怎麼產生：CDC vs dual-write（附錄 A）</a:t>
             </a:r>
           </a:p>
         </p:txBody>
@@ -6424,7 +6424,7 @@
                 <a:latin typeface="PingFang TC"/>
                 <a:ea typeface="PingFang TC"/>
               </a:rPr>
-              <a:t>DynamoDB Streams 機制、三種消費形態、Redis Streams vs Kafka（附錄 B）</a:t>
+              <a:t>DynamoDB Streams 機制與三種消費形態（附錄 B）</a:t>
             </a:r>
           </a:p>
         </p:txBody>
@@ -7301,7 +7301,7 @@
                 <a:latin typeface="PingFang TC"/>
                 <a:ea typeface="PingFang TC"/>
               </a:rPr>
-              <a:t>price-change worker 邏輯 + outbox 狀態機（app/worker_notify.py，附錄 G）</a:t>
+              <a:t>price-change worker + outbox 狀態機（附錄 G）</a:t>
             </a:r>
           </a:p>
         </p:txBody>
@@ -8741,7 +8741,7 @@
                 <a:latin typeface="PingFang TC"/>
                 <a:ea typeface="PingFang TC"/>
               </a:rPr>
-              <a:t>如何快速提供價格歷史查詢以支援圖表？— raw 查詢 → pre-aggregation</a:t>
+              <a:t>價格歷史圖表：raw 查詢 → pre-aggregation</a:t>
             </a:r>
           </a:p>
         </p:txBody>
@@ -15701,7 +15701,7 @@
                 <a:latin typeface="PingFang TC"/>
                 <a:ea typeface="PingFang TC"/>
               </a:rPr>
-              <a:t>Design Amazon Price Tracking —— 45 分鐘怎麼講 + 常見扣分點</a:t>
+              <a:t>45 分鐘怎麼講 + 常見扣分點</a:t>
             </a:r>
           </a:p>
         </p:txBody>
@@ -23554,7 +23554,7 @@
                 <a:latin typeface="PingFang TC"/>
                 <a:ea typeface="PingFang TC"/>
               </a:rPr>
-              <a:t>如何有效率地發現並追蹤 5 億商品？— 三階段演進</a:t>
+              <a:t>發現並追蹤 5 億商品：三階段演進</a:t>
             </a:r>
           </a:p>
         </p:txBody>

--- a/Amazon price tracking service/Amazon_Price_Tracking_Service.pptx
+++ b/Amazon price tracking service/Amazon_Price_Tracking_Service.pptx
@@ -3191,7 +3191,7 @@
           </a:fontRef>
         </p:style>
         <p:txBody>
-          <a:bodyPr rtlCol="0" anchor="ctr" wrap="square" tIns="25400" bIns="25400"/>
+          <a:bodyPr rtlCol="0" anchor="ctr" wrap="square" tIns="25400" bIns="25400" lIns="38100" rIns="38100"/>
           <a:lstStyle/>
           <a:p>
             <a:pPr algn="ctr"/>
@@ -3409,8 +3409,8 @@
         </p:nvSpPr>
         <p:spPr>
           <a:xfrm>
-            <a:off x="548640" y="1417320"/>
-            <a:ext cx="109728" cy="676656"/>
+            <a:off x="548640" y="1371600"/>
+            <a:ext cx="109728" cy="731520"/>
           </a:xfrm>
           <a:prstGeom prst="rect">
             <a:avLst/>
@@ -3453,8 +3453,8 @@
         </p:nvSpPr>
         <p:spPr>
           <a:xfrm>
-            <a:off x="658368" y="1417320"/>
-            <a:ext cx="10972800" cy="676656"/>
+            <a:off x="658368" y="1371600"/>
+            <a:ext cx="10972800" cy="731520"/>
           </a:xfrm>
           <a:prstGeom prst="roundRect">
             <a:avLst/>
@@ -3497,8 +3497,8 @@
         </p:nvSpPr>
         <p:spPr>
           <a:xfrm>
-            <a:off x="868680" y="1508760"/>
-            <a:ext cx="10607040" cy="539496"/>
+            <a:off x="868680" y="1463040"/>
+            <a:ext cx="10607040" cy="594360"/>
           </a:xfrm>
           <a:prstGeom prst="rect">
             <a:avLst/>
@@ -3517,7 +3517,7 @@
               </a:spcAft>
             </a:pPr>
             <a:r>
-              <a:rPr sz="1300" b="1">
+              <a:rPr sz="1250" b="1">
                 <a:solidFill>
                   <a:srgbClr val="0F172A"/>
                 </a:solidFill>
@@ -3534,7 +3534,7 @@
               </a:spcAft>
             </a:pPr>
             <a:r>
-              <a:rPr sz="1200" b="0">
+              <a:rPr sz="1100" b="0">
                 <a:solidFill>
                   <a:srgbClr val="64748B"/>
                 </a:solidFill>
@@ -3555,7 +3555,7 @@
         <p:spPr>
           <a:xfrm>
             <a:off x="548640" y="2130552"/>
-            <a:ext cx="109728" cy="676656"/>
+            <a:ext cx="109728" cy="731520"/>
           </a:xfrm>
           <a:prstGeom prst="rect">
             <a:avLst/>
@@ -3599,7 +3599,7 @@
         <p:spPr>
           <a:xfrm>
             <a:off x="658368" y="2130552"/>
-            <a:ext cx="10972800" cy="676656"/>
+            <a:ext cx="10972800" cy="731520"/>
           </a:xfrm>
           <a:prstGeom prst="roundRect">
             <a:avLst/>
@@ -3643,7 +3643,7 @@
         <p:spPr>
           <a:xfrm>
             <a:off x="868680" y="2221992"/>
-            <a:ext cx="10607040" cy="539496"/>
+            <a:ext cx="10607040" cy="594360"/>
           </a:xfrm>
           <a:prstGeom prst="rect">
             <a:avLst/>
@@ -3662,7 +3662,7 @@
               </a:spcAft>
             </a:pPr>
             <a:r>
-              <a:rPr sz="1300" b="1">
+              <a:rPr sz="1250" b="1">
                 <a:solidFill>
                   <a:srgbClr val="0F172A"/>
                 </a:solidFill>
@@ -3679,14 +3679,14 @@
               </a:spcAft>
             </a:pPr>
             <a:r>
-              <a:rPr sz="1200" b="0">
+              <a:rPr sz="1100" b="0">
                 <a:solidFill>
                   <a:srgbClr val="64748B"/>
                 </a:solidFill>
                 <a:latin typeface="PingFang TC"/>
                 <a:ea typeface="PingFang TC"/>
               </a:rPr>
-              <a:t>拿到「Click the button below to continue shopping」攔截頁（3.7KB、HTTP 200）；chrome120 / safari17_0 / edge101 拿到完整頁（1.2–2.7MB）→ 預設 chrome120，被擋就輪替指紋 + 新 cookie jar</a:t>
+              <a:t>拿到「Click the button below to continue shopping」攔截頁（3.7KB、HTTP 200）；chrome120 / safari17_0 / edge101 拿到完整頁 → 預設 chrome120，被擋就輪替指紋 + 新 cookie jar</a:t>
             </a:r>
           </a:p>
         </p:txBody>
@@ -3699,8 +3699,8 @@
         </p:nvSpPr>
         <p:spPr>
           <a:xfrm>
-            <a:off x="548640" y="2843784"/>
-            <a:ext cx="109728" cy="676656"/>
+            <a:off x="548640" y="2889504"/>
+            <a:ext cx="109728" cy="731520"/>
           </a:xfrm>
           <a:prstGeom prst="rect">
             <a:avLst/>
@@ -3743,8 +3743,8 @@
         </p:nvSpPr>
         <p:spPr>
           <a:xfrm>
-            <a:off x="658368" y="2843784"/>
-            <a:ext cx="10972800" cy="676656"/>
+            <a:off x="658368" y="2889504"/>
+            <a:ext cx="10972800" cy="731520"/>
           </a:xfrm>
           <a:prstGeom prst="roundRect">
             <a:avLst/>
@@ -3787,8 +3787,8 @@
         </p:nvSpPr>
         <p:spPr>
           <a:xfrm>
-            <a:off x="868680" y="2935224"/>
-            <a:ext cx="10607040" cy="539496"/>
+            <a:off x="868680" y="2980944"/>
+            <a:ext cx="10607040" cy="594360"/>
           </a:xfrm>
           <a:prstGeom prst="rect">
             <a:avLst/>
@@ -3807,7 +3807,7 @@
               </a:spcAft>
             </a:pPr>
             <a:r>
-              <a:rPr sz="1300" b="1">
+              <a:rPr sz="1250" b="1">
                 <a:solidFill>
                   <a:srgbClr val="0F172A"/>
                 </a:solidFill>
@@ -3824,7 +3824,7 @@
               </a:spcAft>
             </a:pPr>
             <a:r>
-              <a:rPr sz="1200" b="0">
+              <a:rPr sz="1100" b="0">
                 <a:solidFill>
                   <a:srgbClr val="64748B"/>
                 </a:solidFill>
@@ -3844,8 +3844,8 @@
         </p:nvSpPr>
         <p:spPr>
           <a:xfrm>
-            <a:off x="548640" y="3557016"/>
-            <a:ext cx="109728" cy="676656"/>
+            <a:off x="548640" y="3648456"/>
+            <a:ext cx="109728" cy="731520"/>
           </a:xfrm>
           <a:prstGeom prst="rect">
             <a:avLst/>
@@ -3888,8 +3888,8 @@
         </p:nvSpPr>
         <p:spPr>
           <a:xfrm>
-            <a:off x="658368" y="3557016"/>
-            <a:ext cx="10972800" cy="676656"/>
+            <a:off x="658368" y="3648456"/>
+            <a:ext cx="10972800" cy="731520"/>
           </a:xfrm>
           <a:prstGeom prst="roundRect">
             <a:avLst/>
@@ -3932,8 +3932,8 @@
         </p:nvSpPr>
         <p:spPr>
           <a:xfrm>
-            <a:off x="868680" y="3648456"/>
-            <a:ext cx="10607040" cy="539496"/>
+            <a:off x="868680" y="3739896"/>
+            <a:ext cx="10607040" cy="594360"/>
           </a:xfrm>
           <a:prstGeom prst="rect">
             <a:avLst/>
@@ -3952,7 +3952,7 @@
               </a:spcAft>
             </a:pPr>
             <a:r>
-              <a:rPr sz="1300" b="1">
+              <a:rPr sz="1250" b="1">
                 <a:solidFill>
                   <a:srgbClr val="0F172A"/>
                 </a:solidFill>
@@ -3969,14 +3969,14 @@
               </a:spcAft>
             </a:pPr>
             <a:r>
-              <a:rPr sz="1200" b="0">
+              <a:rPr sz="1100" b="0">
                 <a:solidFill>
                   <a:srgbClr val="64748B"/>
                 </a:solidFill>
                 <a:latin typeface="PingFang TC"/>
                 <a:ea typeface="PingFang TC"/>
               </a:rPr>
-              <a:t>只從 #corePrice_feature_div / #apex_desktop … 的第一個 .a-price 組價（whole + fraction）；整頁第一個 .a-price 會抓到相關商品輪播；「Save 20% with Trade-In」會被當 $20</a:t>
+              <a:t>只從 #corePrice_feature_div / #apex_desktop … 的第一個 .a-price 組價（whole + fraction）；整頁第一個 .a-price 會抓到相關商品輪播、「Save 20% with Trade-In」會被當 $20</a:t>
             </a:r>
           </a:p>
         </p:txBody>
@@ -3989,8 +3989,8 @@
         </p:nvSpPr>
         <p:spPr>
           <a:xfrm>
-            <a:off x="548640" y="4270248"/>
-            <a:ext cx="109728" cy="676656"/>
+            <a:off x="548640" y="4407408"/>
+            <a:ext cx="109728" cy="731520"/>
           </a:xfrm>
           <a:prstGeom prst="rect">
             <a:avLst/>
@@ -4033,8 +4033,8 @@
         </p:nvSpPr>
         <p:spPr>
           <a:xfrm>
-            <a:off x="658368" y="4270248"/>
-            <a:ext cx="10972800" cy="676656"/>
+            <a:off x="658368" y="4407408"/>
+            <a:ext cx="10972800" cy="731520"/>
           </a:xfrm>
           <a:prstGeom prst="roundRect">
             <a:avLst/>
@@ -4077,8 +4077,8 @@
         </p:nvSpPr>
         <p:spPr>
           <a:xfrm>
-            <a:off x="868680" y="4361688"/>
-            <a:ext cx="10607040" cy="539496"/>
+            <a:off x="868680" y="4498848"/>
+            <a:ext cx="10607040" cy="594360"/>
           </a:xfrm>
           <a:prstGeom prst="rect">
             <a:avLst/>
@@ -4097,7 +4097,7 @@
               </a:spcAft>
             </a:pPr>
             <a:r>
-              <a:rPr sz="1300" b="1">
+              <a:rPr sz="1250" b="1">
                 <a:solidFill>
                   <a:srgbClr val="0F172A"/>
                 </a:solidFill>
@@ -4114,7 +4114,7 @@
               </a:spcAft>
             </a:pPr>
             <a:r>
-              <a:rPr sz="1200" b="0">
+              <a:rPr sz="1100" b="0">
                 <a:solidFill>
                   <a:srgbClr val="64748B"/>
                 </a:solidFill>
@@ -4134,8 +4134,8 @@
         </p:nvSpPr>
         <p:spPr>
           <a:xfrm>
-            <a:off x="548640" y="4983480"/>
-            <a:ext cx="109728" cy="676656"/>
+            <a:off x="548640" y="5166360"/>
+            <a:ext cx="109728" cy="731520"/>
           </a:xfrm>
           <a:prstGeom prst="rect">
             <a:avLst/>
@@ -4178,8 +4178,8 @@
         </p:nvSpPr>
         <p:spPr>
           <a:xfrm>
-            <a:off x="658368" y="4983480"/>
-            <a:ext cx="10972800" cy="676656"/>
+            <a:off x="658368" y="5166360"/>
+            <a:ext cx="10972800" cy="731520"/>
           </a:xfrm>
           <a:prstGeom prst="roundRect">
             <a:avLst/>
@@ -4222,8 +4222,8 @@
         </p:nvSpPr>
         <p:spPr>
           <a:xfrm>
-            <a:off x="868680" y="5074920"/>
-            <a:ext cx="10607040" cy="539496"/>
+            <a:off x="868680" y="5257800"/>
+            <a:ext cx="10607040" cy="594360"/>
           </a:xfrm>
           <a:prstGeom prst="rect">
             <a:avLst/>
@@ -4242,7 +4242,7 @@
               </a:spcAft>
             </a:pPr>
             <a:r>
-              <a:rPr sz="1300" b="1">
+              <a:rPr sz="1250" b="1">
                 <a:solidFill>
                   <a:srgbClr val="0F172A"/>
                 </a:solidFill>
@@ -4259,7 +4259,7 @@
               </a:spcAft>
             </a:pPr>
             <a:r>
-              <a:rPr sz="1200" b="0">
+              <a:rPr sz="1100" b="0">
                 <a:solidFill>
                   <a:srgbClr val="64748B"/>
                 </a:solidFill>
@@ -4279,8 +4279,8 @@
         </p:nvSpPr>
         <p:spPr>
           <a:xfrm>
-            <a:off x="548640" y="5696712"/>
-            <a:ext cx="109728" cy="676656"/>
+            <a:off x="548640" y="5925312"/>
+            <a:ext cx="109728" cy="731520"/>
           </a:xfrm>
           <a:prstGeom prst="rect">
             <a:avLst/>
@@ -4323,8 +4323,8 @@
         </p:nvSpPr>
         <p:spPr>
           <a:xfrm>
-            <a:off x="658368" y="5696712"/>
-            <a:ext cx="10972800" cy="676656"/>
+            <a:off x="658368" y="5925312"/>
+            <a:ext cx="10972800" cy="731520"/>
           </a:xfrm>
           <a:prstGeom prst="roundRect">
             <a:avLst/>
@@ -4367,8 +4367,8 @@
         </p:nvSpPr>
         <p:spPr>
           <a:xfrm>
-            <a:off x="868680" y="5788152"/>
-            <a:ext cx="10607040" cy="539496"/>
+            <a:off x="868680" y="6016752"/>
+            <a:ext cx="10607040" cy="594360"/>
           </a:xfrm>
           <a:prstGeom prst="rect">
             <a:avLst/>
@@ -4387,7 +4387,7 @@
               </a:spcAft>
             </a:pPr>
             <a:r>
-              <a:rPr sz="1300" b="1">
+              <a:rPr sz="1250" b="1">
                 <a:solidFill>
                   <a:srgbClr val="0F172A"/>
                 </a:solidFill>
@@ -4404,7 +4404,7 @@
               </a:spcAft>
             </a:pPr>
             <a:r>
-              <a:rPr sz="1200" b="0">
+              <a:rPr sz="1100" b="0">
                 <a:solidFill>
                   <a:srgbClr val="64748B"/>
                 </a:solidFill>
@@ -4574,7 +4574,7 @@
           </a:fontRef>
         </p:style>
         <p:txBody>
-          <a:bodyPr rtlCol="0" anchor="ctr" wrap="square" tIns="25400" bIns="25400"/>
+          <a:bodyPr rtlCol="0" anchor="ctr" wrap="square" tIns="25400" bIns="25400" lIns="38100" rIns="38100"/>
           <a:lstStyle/>
           <a:p>
             <a:pPr algn="ctr"/>
@@ -4767,7 +4767,7 @@
           </a:fontRef>
         </p:style>
         <p:txBody>
-          <a:bodyPr rtlCol="0" anchor="ctr" wrap="square" tIns="25400" bIns="25400"/>
+          <a:bodyPr rtlCol="0" anchor="ctr" wrap="square" tIns="25400" bIns="25400" lIns="38100" rIns="38100"/>
           <a:lstStyle/>
           <a:p>
             <a:pPr algn="ctr"/>
@@ -4996,7 +4996,7 @@
           </a:fontRef>
         </p:style>
         <p:txBody>
-          <a:bodyPr rtlCol="0" anchor="ctr" wrap="square" tIns="25400" bIns="25400"/>
+          <a:bodyPr rtlCol="0" anchor="ctr" wrap="square" tIns="25400" bIns="25400" lIns="38100" rIns="38100"/>
           <a:lstStyle/>
           <a:p>
             <a:pPr algn="ctr"/>
@@ -5114,7 +5114,7 @@
           </a:fontRef>
         </p:style>
         <p:txBody>
-          <a:bodyPr rtlCol="0" anchor="ctr" wrap="square" tIns="25400" bIns="25400"/>
+          <a:bodyPr rtlCol="0" anchor="ctr" wrap="square" tIns="25400" bIns="25400" lIns="38100" rIns="38100"/>
           <a:lstStyle/>
           <a:p>
             <a:pPr algn="ctr"/>
@@ -5232,7 +5232,7 @@
           </a:fontRef>
         </p:style>
         <p:txBody>
-          <a:bodyPr rtlCol="0" anchor="ctr" wrap="square" tIns="25400" bIns="25400"/>
+          <a:bodyPr rtlCol="0" anchor="ctr" wrap="square" tIns="25400" bIns="25400" lIns="38100" rIns="38100"/>
           <a:lstStyle/>
           <a:p>
             <a:pPr algn="ctr"/>
@@ -5350,7 +5350,7 @@
           </a:fontRef>
         </p:style>
         <p:txBody>
-          <a:bodyPr rtlCol="0" anchor="ctr" wrap="square" tIns="25400" bIns="25400"/>
+          <a:bodyPr rtlCol="0" anchor="ctr" wrap="square" tIns="25400" bIns="25400" lIns="38100" rIns="38100"/>
           <a:lstStyle/>
           <a:p>
             <a:pPr algn="ctr"/>
@@ -5468,7 +5468,7 @@
           </a:fontRef>
         </p:style>
         <p:txBody>
-          <a:bodyPr rtlCol="0" anchor="ctr" wrap="square" tIns="25400" bIns="25400"/>
+          <a:bodyPr rtlCol="0" anchor="ctr" wrap="square" tIns="25400" bIns="25400" lIns="38100" rIns="38100"/>
           <a:lstStyle/>
           <a:p>
             <a:pPr algn="ctr"/>
@@ -5586,7 +5586,7 @@
           </a:fontRef>
         </p:style>
         <p:txBody>
-          <a:bodyPr rtlCol="0" anchor="ctr" wrap="square" tIns="25400" bIns="25400"/>
+          <a:bodyPr rtlCol="0" anchor="ctr" wrap="square" tIns="25400" bIns="25400" lIns="38100" rIns="38100"/>
           <a:lstStyle/>
           <a:p>
             <a:pPr algn="ctr"/>
@@ -6280,7 +6280,7 @@
           </a:fontRef>
         </p:style>
         <p:txBody>
-          <a:bodyPr rtlCol="0" anchor="ctr" wrap="square" tIns="25400" bIns="25400"/>
+          <a:bodyPr rtlCol="0" anchor="ctr" wrap="square" tIns="25400" bIns="25400" lIns="38100" rIns="38100"/>
           <a:lstStyle/>
           <a:p>
             <a:pPr algn="ctr"/>
@@ -7315,7 +7315,7 @@
         <p:spPr>
           <a:xfrm>
             <a:off x="457200" y="1554480"/>
-            <a:ext cx="1783080" cy="1234440"/>
+            <a:ext cx="1828800" cy="1234440"/>
           </a:xfrm>
           <a:prstGeom prst="roundRect">
             <a:avLst/>
@@ -7345,12 +7345,12 @@
           </a:fontRef>
         </p:style>
         <p:txBody>
-          <a:bodyPr rtlCol="0" anchor="ctr" wrap="square" tIns="25400" bIns="25400"/>
-          <a:lstStyle/>
-          <a:p>
-            <a:pPr algn="ctr"/>
-            <a:r>
-              <a:rPr sz="1200" b="1">
+          <a:bodyPr rtlCol="0" anchor="ctr" wrap="square" tIns="25400" bIns="25400" lIns="38100" rIns="38100"/>
+          <a:lstStyle/>
+          <a:p>
+            <a:pPr algn="ctr"/>
+            <a:r>
+              <a:rPr sz="1100" b="1">
                 <a:solidFill>
                   <a:srgbClr val="FFFFFF"/>
                 </a:solidFill>
@@ -7363,7 +7363,7 @@
           <a:p>
             <a:pPr algn="ctr"/>
             <a:r>
-              <a:rPr sz="1200" b="0">
+              <a:rPr sz="1100" b="0">
                 <a:solidFill>
                   <a:srgbClr val="FFFFFF"/>
                 </a:solidFill>
@@ -7376,7 +7376,7 @@
           <a:p>
             <a:pPr algn="ctr"/>
             <a:r>
-              <a:rPr sz="1200" b="0">
+              <a:rPr sz="1100" b="0">
                 <a:solidFill>
                   <a:srgbClr val="FFFFFF"/>
                 </a:solidFill>
@@ -7396,8 +7396,8 @@
         </p:nvCxnSpPr>
         <p:spPr>
           <a:xfrm>
-            <a:off x="2240280" y="2167128"/>
-            <a:ext cx="109728" cy="0"/>
+            <a:off x="2286000" y="2167128"/>
+            <a:ext cx="82296" cy="0"/>
           </a:xfrm>
           <a:prstGeom prst="line">
             <a:avLst/>
@@ -7432,8 +7432,8 @@
         </p:nvSpPr>
         <p:spPr>
           <a:xfrm>
-            <a:off x="2350008" y="1554480"/>
-            <a:ext cx="1783080" cy="1234440"/>
+            <a:off x="2368296" y="1554480"/>
+            <a:ext cx="1828800" cy="1234440"/>
           </a:xfrm>
           <a:prstGeom prst="roundRect">
             <a:avLst/>
@@ -7463,12 +7463,12 @@
           </a:fontRef>
         </p:style>
         <p:txBody>
-          <a:bodyPr rtlCol="0" anchor="ctr" wrap="square" tIns="25400" bIns="25400"/>
-          <a:lstStyle/>
-          <a:p>
-            <a:pPr algn="ctr"/>
-            <a:r>
-              <a:rPr sz="1200" b="1">
+          <a:bodyPr rtlCol="0" anchor="ctr" wrap="square" tIns="25400" bIns="25400" lIns="38100" rIns="38100"/>
+          <a:lstStyle/>
+          <a:p>
+            <a:pPr algn="ctr"/>
+            <a:r>
+              <a:rPr sz="1100" b="1">
                 <a:solidFill>
                   <a:srgbClr val="FFFFFF"/>
                 </a:solidFill>
@@ -7481,7 +7481,7 @@
           <a:p>
             <a:pPr algn="ctr"/>
             <a:r>
-              <a:rPr sz="1200" b="0">
+              <a:rPr sz="1100" b="0">
                 <a:solidFill>
                   <a:srgbClr val="FFFFFF"/>
                 </a:solidFill>
@@ -7494,7 +7494,7 @@
           <a:p>
             <a:pPr algn="ctr"/>
             <a:r>
-              <a:rPr sz="1200" b="0">
+              <a:rPr sz="1100" b="0">
                 <a:solidFill>
                   <a:srgbClr val="FFFFFF"/>
                 </a:solidFill>
@@ -7514,8 +7514,8 @@
         </p:nvCxnSpPr>
         <p:spPr>
           <a:xfrm>
-            <a:off x="4133088" y="2167128"/>
-            <a:ext cx="109728" cy="0"/>
+            <a:off x="4197096" y="2167128"/>
+            <a:ext cx="82296" cy="0"/>
           </a:xfrm>
           <a:prstGeom prst="line">
             <a:avLst/>
@@ -7550,8 +7550,8 @@
         </p:nvSpPr>
         <p:spPr>
           <a:xfrm>
-            <a:off x="4242816" y="1554480"/>
-            <a:ext cx="1783080" cy="1234440"/>
+            <a:off x="4279392" y="1554480"/>
+            <a:ext cx="1828800" cy="1234440"/>
           </a:xfrm>
           <a:prstGeom prst="roundRect">
             <a:avLst/>
@@ -7581,12 +7581,12 @@
           </a:fontRef>
         </p:style>
         <p:txBody>
-          <a:bodyPr rtlCol="0" anchor="ctr" wrap="square" tIns="25400" bIns="25400"/>
-          <a:lstStyle/>
-          <a:p>
-            <a:pPr algn="ctr"/>
-            <a:r>
-              <a:rPr sz="1200" b="1">
+          <a:bodyPr rtlCol="0" anchor="ctr" wrap="square" tIns="25400" bIns="25400" lIns="38100" rIns="38100"/>
+          <a:lstStyle/>
+          <a:p>
+            <a:pPr algn="ctr"/>
+            <a:r>
+              <a:rPr sz="1100" b="1">
                 <a:solidFill>
                   <a:srgbClr val="FFFFFF"/>
                 </a:solidFill>
@@ -7599,7 +7599,7 @@
           <a:p>
             <a:pPr algn="ctr"/>
             <a:r>
-              <a:rPr sz="1200" b="0">
+              <a:rPr sz="1100" b="0">
                 <a:solidFill>
                   <a:srgbClr val="FFFFFF"/>
                 </a:solidFill>
@@ -7612,7 +7612,7 @@
           <a:p>
             <a:pPr algn="ctr"/>
             <a:r>
-              <a:rPr sz="1200" b="0">
+              <a:rPr sz="1100" b="0">
                 <a:solidFill>
                   <a:srgbClr val="FFFFFF"/>
                 </a:solidFill>
@@ -7632,8 +7632,8 @@
         </p:nvCxnSpPr>
         <p:spPr>
           <a:xfrm>
-            <a:off x="6025896" y="2167128"/>
-            <a:ext cx="109728" cy="0"/>
+            <a:off x="6108192" y="2167128"/>
+            <a:ext cx="82296" cy="0"/>
           </a:xfrm>
           <a:prstGeom prst="line">
             <a:avLst/>
@@ -7668,8 +7668,8 @@
         </p:nvSpPr>
         <p:spPr>
           <a:xfrm>
-            <a:off x="6135624" y="1554480"/>
-            <a:ext cx="1783080" cy="1234440"/>
+            <a:off x="6190488" y="1554480"/>
+            <a:ext cx="1828800" cy="1234440"/>
           </a:xfrm>
           <a:prstGeom prst="roundRect">
             <a:avLst/>
@@ -7699,12 +7699,12 @@
           </a:fontRef>
         </p:style>
         <p:txBody>
-          <a:bodyPr rtlCol="0" anchor="ctr" wrap="square" tIns="25400" bIns="25400"/>
-          <a:lstStyle/>
-          <a:p>
-            <a:pPr algn="ctr"/>
-            <a:r>
-              <a:rPr sz="1200" b="1">
+          <a:bodyPr rtlCol="0" anchor="ctr" wrap="square" tIns="25400" bIns="25400" lIns="38100" rIns="38100"/>
+          <a:lstStyle/>
+          <a:p>
+            <a:pPr algn="ctr"/>
+            <a:r>
+              <a:rPr sz="1100" b="1">
                 <a:solidFill>
                   <a:srgbClr val="FFFFFF"/>
                 </a:solidFill>
@@ -7717,7 +7717,7 @@
           <a:p>
             <a:pPr algn="ctr"/>
             <a:r>
-              <a:rPr sz="1200" b="0">
+              <a:rPr sz="1100" b="0">
                 <a:solidFill>
                   <a:srgbClr val="FFFFFF"/>
                 </a:solidFill>
@@ -7730,14 +7730,27 @@
           <a:p>
             <a:pPr algn="ctr"/>
             <a:r>
-              <a:rPr sz="1200" b="0">
+              <a:rPr sz="1100" b="0">
                 <a:solidFill>
                   <a:srgbClr val="FFFFFF"/>
                 </a:solidFill>
                 <a:latin typeface="PingFang TC"/>
                 <a:ea typeface="PingFang TC"/>
               </a:rPr>
-              <a:t>$119.5 不通知 (SKIPPED_COOLDOWN)</a:t>
+              <a:t>$119.5 不通知：</a:t>
+            </a:r>
+          </a:p>
+          <a:p>
+            <a:pPr algn="ctr"/>
+            <a:r>
+              <a:rPr sz="1100" b="0">
+                <a:solidFill>
+                  <a:srgbClr val="FFFFFF"/>
+                </a:solidFill>
+                <a:latin typeface="PingFang TC"/>
+                <a:ea typeface="PingFang TC"/>
+              </a:rPr>
+              <a:t>SKIPPED_COOLDOWN</a:t>
             </a:r>
           </a:p>
         </p:txBody>
@@ -7750,8 +7763,8 @@
         </p:nvCxnSpPr>
         <p:spPr>
           <a:xfrm>
-            <a:off x="7918704" y="2167128"/>
-            <a:ext cx="109728" cy="0"/>
+            <a:off x="8019288" y="2167128"/>
+            <a:ext cx="82296" cy="0"/>
           </a:xfrm>
           <a:prstGeom prst="line">
             <a:avLst/>
@@ -7786,8 +7799,8 @@
         </p:nvSpPr>
         <p:spPr>
           <a:xfrm>
-            <a:off x="8028432" y="1554480"/>
-            <a:ext cx="1783080" cy="1234440"/>
+            <a:off x="8101584" y="1554480"/>
+            <a:ext cx="1828800" cy="1234440"/>
           </a:xfrm>
           <a:prstGeom prst="roundRect">
             <a:avLst/>
@@ -7817,12 +7830,12 @@
           </a:fontRef>
         </p:style>
         <p:txBody>
-          <a:bodyPr rtlCol="0" anchor="ctr" wrap="square" tIns="25400" bIns="25400"/>
-          <a:lstStyle/>
-          <a:p>
-            <a:pPr algn="ctr"/>
-            <a:r>
-              <a:rPr sz="1200" b="1">
+          <a:bodyPr rtlCol="0" anchor="ctr" wrap="square" tIns="25400" bIns="25400" lIns="38100" rIns="38100"/>
+          <a:lstStyle/>
+          <a:p>
+            <a:pPr algn="ctr"/>
+            <a:r>
+              <a:rPr sz="1100" b="1">
                 <a:solidFill>
                   <a:srgbClr val="FFFFFF"/>
                 </a:solidFill>
@@ -7835,7 +7848,7 @@
           <a:p>
             <a:pPr algn="ctr"/>
             <a:r>
-              <a:rPr sz="1200" b="0">
+              <a:rPr sz="1100" b="0">
                 <a:solidFill>
                   <a:srgbClr val="FFFFFF"/>
                 </a:solidFill>
@@ -7848,7 +7861,7 @@
           <a:p>
             <a:pPr algn="ctr"/>
             <a:r>
-              <a:rPr sz="1200" b="0">
+              <a:rPr sz="1100" b="0">
                 <a:solidFill>
                   <a:srgbClr val="FFFFFF"/>
                 </a:solidFill>
@@ -7868,8 +7881,8 @@
         </p:nvCxnSpPr>
         <p:spPr>
           <a:xfrm>
-            <a:off x="9811512" y="2167128"/>
-            <a:ext cx="109728" cy="0"/>
+            <a:off x="9930384" y="2167128"/>
+            <a:ext cx="82296" cy="0"/>
           </a:xfrm>
           <a:prstGeom prst="line">
             <a:avLst/>
@@ -7904,8 +7917,8 @@
         </p:nvSpPr>
         <p:spPr>
           <a:xfrm>
-            <a:off x="9921240" y="1554480"/>
-            <a:ext cx="1783080" cy="1234440"/>
+            <a:off x="10012680" y="1554480"/>
+            <a:ext cx="1828800" cy="1234440"/>
           </a:xfrm>
           <a:prstGeom prst="roundRect">
             <a:avLst/>
@@ -7935,12 +7948,12 @@
           </a:fontRef>
         </p:style>
         <p:txBody>
-          <a:bodyPr rtlCol="0" anchor="ctr" wrap="square" tIns="25400" bIns="25400"/>
-          <a:lstStyle/>
-          <a:p>
-            <a:pPr algn="ctr"/>
-            <a:r>
-              <a:rPr sz="1200" b="1">
+          <a:bodyPr rtlCol="0" anchor="ctr" wrap="square" tIns="25400" bIns="25400" lIns="38100" rIns="38100"/>
+          <a:lstStyle/>
+          <a:p>
+            <a:pPr algn="ctr"/>
+            <a:r>
+              <a:rPr sz="1100" b="1">
                 <a:solidFill>
                   <a:srgbClr val="FFFFFF"/>
                 </a:solidFill>
@@ -7953,7 +7966,7 @@
           <a:p>
             <a:pPr algn="ctr"/>
             <a:r>
-              <a:rPr sz="1200" b="0">
+              <a:rPr sz="1100" b="0">
                 <a:solidFill>
                   <a:srgbClr val="FFFFFF"/>
                 </a:solidFill>
@@ -7966,7 +7979,7 @@
           <a:p>
             <a:pPr algn="ctr"/>
             <a:r>
-              <a:rPr sz="1200" b="0">
+              <a:rPr sz="1100" b="0">
                 <a:solidFill>
                   <a:srgbClr val="FFFFFF"/>
                 </a:solidFill>
@@ -8057,7 +8070,7 @@
           </a:fontRef>
         </p:style>
         <p:txBody>
-          <a:bodyPr rtlCol="0" anchor="ctr" wrap="square" tIns="25400" bIns="25400"/>
+          <a:bodyPr rtlCol="0" anchor="ctr" wrap="square" tIns="25400" bIns="25400" lIns="38100" rIns="38100"/>
           <a:lstStyle/>
           <a:p>
             <a:pPr algn="ctr"/>
@@ -8139,7 +8152,7 @@
           </a:fontRef>
         </p:style>
         <p:txBody>
-          <a:bodyPr rtlCol="0" anchor="ctr" wrap="square" tIns="25400" bIns="25400"/>
+          <a:bodyPr rtlCol="0" anchor="ctr" wrap="square" tIns="25400" bIns="25400" lIns="38100" rIns="38100"/>
           <a:lstStyle/>
           <a:p>
             <a:pPr algn="ctr"/>
@@ -8221,7 +8234,7 @@
           </a:fontRef>
         </p:style>
         <p:txBody>
-          <a:bodyPr rtlCol="0" anchor="ctr" wrap="square" tIns="25400" bIns="25400"/>
+          <a:bodyPr rtlCol="0" anchor="ctr" wrap="square" tIns="25400" bIns="25400" lIns="38100" rIns="38100"/>
           <a:lstStyle/>
           <a:p>
             <a:pPr algn="ctr"/>
@@ -8303,7 +8316,7 @@
           </a:fontRef>
         </p:style>
         <p:txBody>
-          <a:bodyPr rtlCol="0" anchor="ctr" wrap="square" tIns="25400" bIns="25400"/>
+          <a:bodyPr rtlCol="0" anchor="ctr" wrap="square" tIns="25400" bIns="25400" lIns="38100" rIns="38100"/>
           <a:lstStyle/>
           <a:p>
             <a:pPr algn="ctr"/>
@@ -8385,7 +8398,7 @@
           </a:fontRef>
         </p:style>
         <p:txBody>
-          <a:bodyPr rtlCol="0" anchor="ctr" wrap="square" tIns="25400" bIns="25400"/>
+          <a:bodyPr rtlCol="0" anchor="ctr" wrap="square" tIns="25400" bIns="25400" lIns="38100" rIns="38100"/>
           <a:lstStyle/>
           <a:p>
             <a:pPr algn="ctr"/>
@@ -8508,8 +8521,43 @@
         </p:nvCxnSpPr>
         <p:spPr>
           <a:xfrm>
-            <a:off x="4818888" y="4251960"/>
-            <a:ext cx="2414016" cy="137160"/>
+            <a:off x="3767328.0" y="4480560"/>
+            <a:ext cx="0.0" cy="109728"/>
+          </a:xfrm>
+          <a:prstGeom prst="line">
+            <a:avLst/>
+          </a:prstGeom>
+          <a:ln w="15240">
+            <a:solidFill>
+              <a:srgbClr val="DC2626"/>
+            </a:solidFill>
+          </a:ln>
+        </p:spPr>
+        <p:style>
+          <a:lnRef idx="2">
+            <a:schemeClr val="accent1"/>
+          </a:lnRef>
+          <a:fillRef idx="0">
+            <a:schemeClr val="accent1"/>
+          </a:fillRef>
+          <a:effectRef idx="1">
+            <a:schemeClr val="accent1"/>
+          </a:effectRef>
+          <a:fontRef idx="minor">
+            <a:schemeClr val="tx1"/>
+          </a:fontRef>
+        </p:style>
+      </p:cxnSp>
+      <p:cxnSp>
+        <p:nvCxnSpPr>
+          <p:cNvPr id="24" name="Connector 23"/>
+          <p:cNvCxnSpPr/>
+          <p:nvPr/>
+        </p:nvCxnSpPr>
+        <p:spPr>
+          <a:xfrm>
+            <a:off x="3767328.0" y="4590288"/>
+            <a:ext cx="4517136.0" cy="0"/>
           </a:xfrm>
           <a:prstGeom prst="line">
             <a:avLst/>
@@ -8536,15 +8584,50 @@
           </a:fontRef>
         </p:style>
       </p:cxnSp>
-      <p:sp>
-        <p:nvSpPr>
-          <p:cNvPr id="24" name="TextBox 23"/>
+      <p:cxnSp>
+        <p:nvCxnSpPr>
+          <p:cNvPr id="25" name="Connector 24"/>
+          <p:cNvCxnSpPr/>
+          <p:nvPr/>
+        </p:nvCxnSpPr>
+        <p:spPr>
+          <a:xfrm flipV="1">
+            <a:off x="8284464.0" y="4480560"/>
+            <a:ext cx="0.0" cy="109728"/>
+          </a:xfrm>
+          <a:prstGeom prst="line">
+            <a:avLst/>
+          </a:prstGeom>
+          <a:ln w="15240">
+            <a:solidFill>
+              <a:srgbClr val="DC2626"/>
+            </a:solidFill>
+          </a:ln>
+        </p:spPr>
+        <p:style>
+          <a:lnRef idx="2">
+            <a:schemeClr val="accent1"/>
+          </a:lnRef>
+          <a:fillRef idx="0">
+            <a:schemeClr val="accent1"/>
+          </a:fillRef>
+          <a:effectRef idx="1">
+            <a:schemeClr val="accent1"/>
+          </a:effectRef>
+          <a:fontRef idx="minor">
+            <a:schemeClr val="tx1"/>
+          </a:fontRef>
+        </p:style>
+      </p:cxnSp>
+      <p:sp>
+        <p:nvSpPr>
+          <p:cNvPr id="26" name="TextBox 25"/>
           <p:cNvSpPr txBox="1"/>
           <p:nvPr/>
         </p:nvSpPr>
         <p:spPr>
           <a:xfrm>
-            <a:off x="457200" y="4754880"/>
+            <a:off x="457200" y="4846320"/>
             <a:ext cx="11247120" cy="1737360"/>
           </a:xfrm>
           <a:prstGeom prst="rect">
@@ -8892,7 +8975,7 @@
           </a:fontRef>
         </p:style>
         <p:txBody>
-          <a:bodyPr rtlCol="0" anchor="ctr" wrap="square" tIns="25400" bIns="25400"/>
+          <a:bodyPr rtlCol="0" anchor="ctr" wrap="square" tIns="25400" bIns="25400" lIns="38100" rIns="38100"/>
           <a:lstStyle/>
           <a:p>
             <a:pPr algn="ctr"/>
@@ -9935,7 +10018,7 @@
           </a:fontRef>
         </p:style>
         <p:txBody>
-          <a:bodyPr rtlCol="0" anchor="ctr" wrap="square" tIns="25400" bIns="25400"/>
+          <a:bodyPr rtlCol="0" anchor="ctr" wrap="square" tIns="25400" bIns="25400" lIns="38100" rIns="38100"/>
           <a:lstStyle/>
           <a:p>
             <a:pPr algn="ctr"/>
@@ -10128,7 +10211,7 @@
           </a:fontRef>
         </p:style>
         <p:txBody>
-          <a:bodyPr rtlCol="0" anchor="ctr" wrap="square" tIns="25400" bIns="25400"/>
+          <a:bodyPr rtlCol="0" anchor="ctr" wrap="square" tIns="25400" bIns="25400" lIns="38100" rIns="38100"/>
           <a:lstStyle/>
           <a:p>
             <a:pPr algn="ctr"/>
@@ -10321,7 +10404,7 @@
           </a:fontRef>
         </p:style>
         <p:txBody>
-          <a:bodyPr rtlCol="0" anchor="ctr" wrap="square" tIns="25400" bIns="25400"/>
+          <a:bodyPr rtlCol="0" anchor="ctr" wrap="square" tIns="25400" bIns="25400" lIns="38100" rIns="38100"/>
           <a:lstStyle/>
           <a:p>
             <a:pPr algn="ctr"/>
@@ -10514,7 +10597,7 @@
           </a:fontRef>
         </p:style>
         <p:txBody>
-          <a:bodyPr rtlCol="0" anchor="ctr" wrap="square" tIns="25400" bIns="25400"/>
+          <a:bodyPr rtlCol="0" anchor="ctr" wrap="square" tIns="25400" bIns="25400" lIns="38100" rIns="38100"/>
           <a:lstStyle/>
           <a:p>
             <a:pPr algn="ctr"/>
@@ -10659,8 +10742,8 @@
           <p:nvPr/>
         </p:nvGraphicFramePr>
         <p:xfrm>
-          <a:off x="548640" y="1463040"/>
-          <a:ext cx="11109960" cy="4480560"/>
+          <a:off x="548640" y="1417320"/>
+          <a:ext cx="11109960" cy="4297680"/>
         </p:xfrm>
         <a:graphic>
           <a:graphicData uri="http://schemas.openxmlformats.org/drawingml/2006/table">
@@ -10674,7 +10757,7 @@
                 <a:gridCol w="3200400"/>
                 <a:gridCol w="2240280"/>
               </a:tblGrid>
-              <a:tr h="373380">
+              <a:tr h="358140">
                 <a:tc>
                   <a:txBody>
                     <a:bodyPr/>
@@ -10768,14 +10851,14 @@
                   </a:tcPr>
                 </a:tc>
               </a:tr>
-              <a:tr h="373380">
+              <a:tr h="358140">
                 <a:tc>
                   <a:txBody>
                     <a:bodyPr/>
                     <a:lstStyle/>
                     <a:p>
                       <a:r>
-                        <a:rPr sz="1150" b="1">
+                        <a:rPr sz="1100" b="1">
                           <a:solidFill>
                             <a:srgbClr val="2563EB"/>
                           </a:solidFill>
@@ -10798,7 +10881,7 @@
                     <a:lstStyle/>
                     <a:p>
                       <a:r>
-                        <a:rPr sz="1150" b="0">
+                        <a:rPr sz="1100" b="0">
                           <a:solidFill>
                             <a:srgbClr val="0F172A"/>
                           </a:solidFill>
@@ -10821,7 +10904,7 @@
                     <a:lstStyle/>
                     <a:p>
                       <a:r>
-                        <a:rPr sz="1150" b="0">
+                        <a:rPr sz="1100" b="0">
                           <a:solidFill>
                             <a:srgbClr val="0F172A"/>
                           </a:solidFill>
@@ -10844,7 +10927,7 @@
                     <a:lstStyle/>
                     <a:p>
                       <a:r>
-                        <a:rPr sz="1150" b="0">
+                        <a:rPr sz="1100" b="0">
                           <a:solidFill>
                             <a:srgbClr val="0F172A"/>
                           </a:solidFill>
@@ -10862,14 +10945,14 @@
                   </a:tcPr>
                 </a:tc>
               </a:tr>
-              <a:tr h="373380">
+              <a:tr h="358140">
                 <a:tc>
                   <a:txBody>
                     <a:bodyPr/>
                     <a:lstStyle/>
                     <a:p>
                       <a:r>
-                        <a:rPr sz="1150" b="1">
+                        <a:rPr sz="1100" b="1">
                           <a:solidFill>
                             <a:srgbClr val="2563EB"/>
                           </a:solidFill>
@@ -10892,7 +10975,7 @@
                     <a:lstStyle/>
                     <a:p>
                       <a:r>
-                        <a:rPr sz="1150" b="0">
+                        <a:rPr sz="1100" b="0">
                           <a:solidFill>
                             <a:srgbClr val="0F172A"/>
                           </a:solidFill>
@@ -10915,7 +10998,7 @@
                     <a:lstStyle/>
                     <a:p>
                       <a:r>
-                        <a:rPr sz="1150" b="0">
+                        <a:rPr sz="1100" b="0">
                           <a:solidFill>
                             <a:srgbClr val="0F172A"/>
                           </a:solidFill>
@@ -10938,7 +11021,7 @@
                     <a:lstStyle/>
                     <a:p>
                       <a:r>
-                        <a:rPr sz="1150" b="0">
+                        <a:rPr sz="1100" b="0">
                           <a:solidFill>
                             <a:srgbClr val="0F172A"/>
                           </a:solidFill>
@@ -10956,14 +11039,14 @@
                   </a:tcPr>
                 </a:tc>
               </a:tr>
-              <a:tr h="373380">
+              <a:tr h="358140">
                 <a:tc>
                   <a:txBody>
                     <a:bodyPr/>
                     <a:lstStyle/>
                     <a:p>
                       <a:r>
-                        <a:rPr sz="1150" b="1">
+                        <a:rPr sz="1100" b="1">
                           <a:solidFill>
                             <a:srgbClr val="2563EB"/>
                           </a:solidFill>
@@ -10986,7 +11069,7 @@
                     <a:lstStyle/>
                     <a:p>
                       <a:r>
-                        <a:rPr sz="1150" b="0">
+                        <a:rPr sz="1100" b="0">
                           <a:solidFill>
                             <a:srgbClr val="0F172A"/>
                           </a:solidFill>
@@ -11009,7 +11092,7 @@
                     <a:lstStyle/>
                     <a:p>
                       <a:r>
-                        <a:rPr sz="1150" b="0">
+                        <a:rPr sz="1100" b="0">
                           <a:solidFill>
                             <a:srgbClr val="0F172A"/>
                           </a:solidFill>
@@ -11032,7 +11115,7 @@
                     <a:lstStyle/>
                     <a:p>
                       <a:r>
-                        <a:rPr sz="1150" b="0">
+                        <a:rPr sz="1100" b="0">
                           <a:solidFill>
                             <a:srgbClr val="0F172A"/>
                           </a:solidFill>
@@ -11050,14 +11133,14 @@
                   </a:tcPr>
                 </a:tc>
               </a:tr>
-              <a:tr h="373380">
+              <a:tr h="358140">
                 <a:tc>
                   <a:txBody>
                     <a:bodyPr/>
                     <a:lstStyle/>
                     <a:p>
                       <a:r>
-                        <a:rPr sz="1150" b="1">
+                        <a:rPr sz="1100" b="1">
                           <a:solidFill>
                             <a:srgbClr val="2563EB"/>
                           </a:solidFill>
@@ -11080,7 +11163,7 @@
                     <a:lstStyle/>
                     <a:p>
                       <a:r>
-                        <a:rPr sz="1150" b="0">
+                        <a:rPr sz="1100" b="0">
                           <a:solidFill>
                             <a:srgbClr val="0F172A"/>
                           </a:solidFill>
@@ -11103,7 +11186,7 @@
                     <a:lstStyle/>
                     <a:p>
                       <a:r>
-                        <a:rPr sz="1150" b="0">
+                        <a:rPr sz="1100" b="0">
                           <a:solidFill>
                             <a:srgbClr val="0F172A"/>
                           </a:solidFill>
@@ -11126,7 +11209,7 @@
                     <a:lstStyle/>
                     <a:p>
                       <a:r>
-                        <a:rPr sz="1150" b="0">
+                        <a:rPr sz="1100" b="0">
                           <a:solidFill>
                             <a:srgbClr val="0F172A"/>
                           </a:solidFill>
@@ -11144,14 +11227,14 @@
                   </a:tcPr>
                 </a:tc>
               </a:tr>
-              <a:tr h="373380">
+              <a:tr h="358140">
                 <a:tc>
                   <a:txBody>
                     <a:bodyPr/>
                     <a:lstStyle/>
                     <a:p>
                       <a:r>
-                        <a:rPr sz="1150" b="1">
+                        <a:rPr sz="1100" b="1">
                           <a:solidFill>
                             <a:srgbClr val="2563EB"/>
                           </a:solidFill>
@@ -11174,7 +11257,7 @@
                     <a:lstStyle/>
                     <a:p>
                       <a:r>
-                        <a:rPr sz="1150" b="0">
+                        <a:rPr sz="1100" b="0">
                           <a:solidFill>
                             <a:srgbClr val="0F172A"/>
                           </a:solidFill>
@@ -11197,7 +11280,7 @@
                     <a:lstStyle/>
                     <a:p>
                       <a:r>
-                        <a:rPr sz="1150" b="0">
+                        <a:rPr sz="1100" b="0">
                           <a:solidFill>
                             <a:srgbClr val="0F172A"/>
                           </a:solidFill>
@@ -11220,7 +11303,7 @@
                     <a:lstStyle/>
                     <a:p>
                       <a:r>
-                        <a:rPr sz="1150" b="0">
+                        <a:rPr sz="1100" b="0">
                           <a:solidFill>
                             <a:srgbClr val="0F172A"/>
                           </a:solidFill>
@@ -11238,14 +11321,14 @@
                   </a:tcPr>
                 </a:tc>
               </a:tr>
-              <a:tr h="373380">
+              <a:tr h="358140">
                 <a:tc>
                   <a:txBody>
                     <a:bodyPr/>
                     <a:lstStyle/>
                     <a:p>
                       <a:r>
-                        <a:rPr sz="1150" b="1">
+                        <a:rPr sz="1100" b="1">
                           <a:solidFill>
                             <a:srgbClr val="2563EB"/>
                           </a:solidFill>
@@ -11268,7 +11351,7 @@
                     <a:lstStyle/>
                     <a:p>
                       <a:r>
-                        <a:rPr sz="1150" b="0">
+                        <a:rPr sz="1100" b="0">
                           <a:solidFill>
                             <a:srgbClr val="0F172A"/>
                           </a:solidFill>
@@ -11291,7 +11374,7 @@
                     <a:lstStyle/>
                     <a:p>
                       <a:r>
-                        <a:rPr sz="1150" b="0">
+                        <a:rPr sz="1100" b="0">
                           <a:solidFill>
                             <a:srgbClr val="0F172A"/>
                           </a:solidFill>
@@ -11314,7 +11397,7 @@
                     <a:lstStyle/>
                     <a:p>
                       <a:r>
-                        <a:rPr sz="1150" b="0">
+                        <a:rPr sz="1100" b="0">
                           <a:solidFill>
                             <a:srgbClr val="0F172A"/>
                           </a:solidFill>
@@ -11332,14 +11415,14 @@
                   </a:tcPr>
                 </a:tc>
               </a:tr>
-              <a:tr h="373380">
+              <a:tr h="358140">
                 <a:tc>
                   <a:txBody>
                     <a:bodyPr/>
                     <a:lstStyle/>
                     <a:p>
                       <a:r>
-                        <a:rPr sz="1150" b="1">
+                        <a:rPr sz="1100" b="1">
                           <a:solidFill>
                             <a:srgbClr val="2563EB"/>
                           </a:solidFill>
@@ -11362,7 +11445,7 @@
                     <a:lstStyle/>
                     <a:p>
                       <a:r>
-                        <a:rPr sz="1150" b="0">
+                        <a:rPr sz="1100" b="0">
                           <a:solidFill>
                             <a:srgbClr val="0F172A"/>
                           </a:solidFill>
@@ -11385,7 +11468,7 @@
                     <a:lstStyle/>
                     <a:p>
                       <a:r>
-                        <a:rPr sz="1150" b="0">
+                        <a:rPr sz="1100" b="0">
                           <a:solidFill>
                             <a:srgbClr val="0F172A"/>
                           </a:solidFill>
@@ -11408,7 +11491,7 @@
                     <a:lstStyle/>
                     <a:p>
                       <a:r>
-                        <a:rPr sz="1150" b="0">
+                        <a:rPr sz="1100" b="0">
                           <a:solidFill>
                             <a:srgbClr val="0F172A"/>
                           </a:solidFill>
@@ -11426,14 +11509,14 @@
                   </a:tcPr>
                 </a:tc>
               </a:tr>
-              <a:tr h="373380">
+              <a:tr h="358140">
                 <a:tc>
                   <a:txBody>
                     <a:bodyPr/>
                     <a:lstStyle/>
                     <a:p>
                       <a:r>
-                        <a:rPr sz="1150" b="1">
+                        <a:rPr sz="1100" b="1">
                           <a:solidFill>
                             <a:srgbClr val="2563EB"/>
                           </a:solidFill>
@@ -11456,7 +11539,7 @@
                     <a:lstStyle/>
                     <a:p>
                       <a:r>
-                        <a:rPr sz="1150" b="0">
+                        <a:rPr sz="1100" b="0">
                           <a:solidFill>
                             <a:srgbClr val="0F172A"/>
                           </a:solidFill>
@@ -11479,7 +11562,7 @@
                     <a:lstStyle/>
                     <a:p>
                       <a:r>
-                        <a:rPr sz="1150" b="0">
+                        <a:rPr sz="1100" b="0">
                           <a:solidFill>
                             <a:srgbClr val="0F172A"/>
                           </a:solidFill>
@@ -11502,7 +11585,7 @@
                     <a:lstStyle/>
                     <a:p>
                       <a:r>
-                        <a:rPr sz="1150" b="0">
+                        <a:rPr sz="1100" b="0">
                           <a:solidFill>
                             <a:srgbClr val="0F172A"/>
                           </a:solidFill>
@@ -11520,14 +11603,14 @@
                   </a:tcPr>
                 </a:tc>
               </a:tr>
-              <a:tr h="373380">
+              <a:tr h="358140">
                 <a:tc>
                   <a:txBody>
                     <a:bodyPr/>
                     <a:lstStyle/>
                     <a:p>
                       <a:r>
-                        <a:rPr sz="1150" b="1">
+                        <a:rPr sz="1100" b="1">
                           <a:solidFill>
                             <a:srgbClr val="2563EB"/>
                           </a:solidFill>
@@ -11550,7 +11633,7 @@
                     <a:lstStyle/>
                     <a:p>
                       <a:r>
-                        <a:rPr sz="1150" b="0">
+                        <a:rPr sz="1100" b="0">
                           <a:solidFill>
                             <a:srgbClr val="0F172A"/>
                           </a:solidFill>
@@ -11573,7 +11656,7 @@
                     <a:lstStyle/>
                     <a:p>
                       <a:r>
-                        <a:rPr sz="1150" b="0">
+                        <a:rPr sz="1100" b="0">
                           <a:solidFill>
                             <a:srgbClr val="0F172A"/>
                           </a:solidFill>
@@ -11596,7 +11679,7 @@
                     <a:lstStyle/>
                     <a:p>
                       <a:r>
-                        <a:rPr sz="1150" b="0">
+                        <a:rPr sz="1100" b="0">
                           <a:solidFill>
                             <a:srgbClr val="0F172A"/>
                           </a:solidFill>
@@ -11614,14 +11697,14 @@
                   </a:tcPr>
                 </a:tc>
               </a:tr>
-              <a:tr h="373380">
+              <a:tr h="358140">
                 <a:tc>
                   <a:txBody>
                     <a:bodyPr/>
                     <a:lstStyle/>
                     <a:p>
                       <a:r>
-                        <a:rPr sz="1150" b="1">
+                        <a:rPr sz="1100" b="1">
                           <a:solidFill>
                             <a:srgbClr val="2563EB"/>
                           </a:solidFill>
@@ -11644,7 +11727,7 @@
                     <a:lstStyle/>
                     <a:p>
                       <a:r>
-                        <a:rPr sz="1150" b="0">
+                        <a:rPr sz="1100" b="0">
                           <a:solidFill>
                             <a:srgbClr val="0F172A"/>
                           </a:solidFill>
@@ -11667,7 +11750,7 @@
                     <a:lstStyle/>
                     <a:p>
                       <a:r>
-                        <a:rPr sz="1150" b="0">
+                        <a:rPr sz="1100" b="0">
                           <a:solidFill>
                             <a:srgbClr val="0F172A"/>
                           </a:solidFill>
@@ -11690,7 +11773,7 @@
                     <a:lstStyle/>
                     <a:p>
                       <a:r>
-                        <a:rPr sz="1150" b="0">
+                        <a:rPr sz="1100" b="0">
                           <a:solidFill>
                             <a:srgbClr val="0F172A"/>
                           </a:solidFill>
@@ -11708,14 +11791,14 @@
                   </a:tcPr>
                 </a:tc>
               </a:tr>
-              <a:tr h="373380">
+              <a:tr h="358140">
                 <a:tc>
                   <a:txBody>
                     <a:bodyPr/>
                     <a:lstStyle/>
                     <a:p>
                       <a:r>
-                        <a:rPr sz="1150" b="1">
+                        <a:rPr sz="1100" b="1">
                           <a:solidFill>
                             <a:srgbClr val="2563EB"/>
                           </a:solidFill>
@@ -11738,7 +11821,7 @@
                     <a:lstStyle/>
                     <a:p>
                       <a:r>
-                        <a:rPr sz="1150" b="0">
+                        <a:rPr sz="1100" b="0">
                           <a:solidFill>
                             <a:srgbClr val="0F172A"/>
                           </a:solidFill>
@@ -11761,7 +11844,7 @@
                     <a:lstStyle/>
                     <a:p>
                       <a:r>
-                        <a:rPr sz="1150" b="0">
+                        <a:rPr sz="1100" b="0">
                           <a:solidFill>
                             <a:srgbClr val="0F172A"/>
                           </a:solidFill>
@@ -11784,7 +11867,7 @@
                     <a:lstStyle/>
                     <a:p>
                       <a:r>
-                        <a:rPr sz="1150" b="0">
+                        <a:rPr sz="1100" b="0">
                           <a:solidFill>
                             <a:srgbClr val="0F172A"/>
                           </a:solidFill>
@@ -11814,8 +11897,8 @@
         </p:nvSpPr>
         <p:spPr>
           <a:xfrm>
-            <a:off x="548640" y="6035040"/>
-            <a:ext cx="11155680" cy="457200"/>
+            <a:off x="548640" y="6263640"/>
+            <a:ext cx="11155680" cy="411480"/>
           </a:xfrm>
           <a:prstGeom prst="rect">
             <a:avLst/>
@@ -12004,7 +12087,7 @@
           </a:fontRef>
         </p:style>
         <p:txBody>
-          <a:bodyPr rtlCol="0" anchor="ctr" wrap="square" tIns="25400" bIns="25400"/>
+          <a:bodyPr rtlCol="0" anchor="ctr" wrap="square" tIns="25400" bIns="25400" lIns="38100" rIns="38100"/>
           <a:lstStyle/>
           <a:p>
             <a:pPr algn="ctr"/>
@@ -12073,7 +12156,7 @@
           </a:fontRef>
         </p:style>
         <p:txBody>
-          <a:bodyPr rtlCol="0" anchor="ctr" wrap="square" tIns="25400" bIns="25400"/>
+          <a:bodyPr rtlCol="0" anchor="ctr" wrap="square" tIns="25400" bIns="25400" lIns="38100" rIns="38100"/>
           <a:lstStyle/>
           <a:p>
             <a:pPr algn="ctr"/>
@@ -12142,7 +12225,7 @@
           </a:fontRef>
         </p:style>
         <p:txBody>
-          <a:bodyPr rtlCol="0" anchor="ctr" wrap="square" tIns="25400" bIns="25400"/>
+          <a:bodyPr rtlCol="0" anchor="ctr" wrap="square" tIns="25400" bIns="25400" lIns="38100" rIns="38100"/>
           <a:lstStyle/>
           <a:p>
             <a:pPr algn="ctr"/>
@@ -12211,7 +12294,7 @@
           </a:fontRef>
         </p:style>
         <p:txBody>
-          <a:bodyPr rtlCol="0" anchor="ctr" wrap="square" tIns="25400" bIns="25400"/>
+          <a:bodyPr rtlCol="0" anchor="ctr" wrap="square" tIns="25400" bIns="25400" lIns="38100" rIns="38100"/>
           <a:lstStyle/>
           <a:p>
             <a:pPr algn="ctr"/>
@@ -12280,7 +12363,7 @@
           </a:fontRef>
         </p:style>
         <p:txBody>
-          <a:bodyPr rtlCol="0" anchor="ctr" wrap="square" tIns="25400" bIns="25400"/>
+          <a:bodyPr rtlCol="0" anchor="ctr" wrap="square" tIns="25400" bIns="25400" lIns="38100" rIns="38100"/>
           <a:lstStyle/>
           <a:p>
             <a:pPr algn="ctr"/>
@@ -12349,7 +12432,7 @@
           </a:fontRef>
         </p:style>
         <p:txBody>
-          <a:bodyPr rtlCol="0" anchor="ctr" wrap="square" tIns="25400" bIns="25400"/>
+          <a:bodyPr rtlCol="0" anchor="ctr" wrap="square" tIns="25400" bIns="25400" lIns="38100" rIns="38100"/>
           <a:lstStyle/>
           <a:p>
             <a:pPr algn="ctr"/>
@@ -12625,7 +12708,7 @@
           </a:fontRef>
         </p:style>
         <p:txBody>
-          <a:bodyPr rtlCol="0" anchor="ctr" wrap="square" tIns="25400" bIns="25400"/>
+          <a:bodyPr rtlCol="0" anchor="ctr" wrap="square" tIns="25400" bIns="25400" lIns="38100" rIns="38100"/>
           <a:lstStyle/>
           <a:p>
             <a:pPr algn="ctr"/>
@@ -12694,7 +12777,7 @@
           </a:fontRef>
         </p:style>
         <p:txBody>
-          <a:bodyPr rtlCol="0" anchor="ctr" wrap="square" tIns="25400" bIns="25400"/>
+          <a:bodyPr rtlCol="0" anchor="ctr" wrap="square" tIns="25400" bIns="25400" lIns="38100" rIns="38100"/>
           <a:lstStyle/>
           <a:p>
             <a:pPr algn="ctr"/>
@@ -12763,7 +12846,7 @@
           </a:fontRef>
         </p:style>
         <p:txBody>
-          <a:bodyPr rtlCol="0" anchor="ctr" wrap="square" tIns="25400" bIns="25400"/>
+          <a:bodyPr rtlCol="0" anchor="ctr" wrap="square" tIns="25400" bIns="25400" lIns="38100" rIns="38100"/>
           <a:lstStyle/>
           <a:p>
             <a:pPr algn="ctr"/>
@@ -12940,7 +13023,7 @@
           </a:fontRef>
         </p:style>
         <p:txBody>
-          <a:bodyPr rtlCol="0" anchor="ctr" wrap="square" tIns="25400" bIns="25400"/>
+          <a:bodyPr rtlCol="0" anchor="ctr" wrap="square" tIns="25400" bIns="25400" lIns="38100" rIns="38100"/>
           <a:lstStyle/>
           <a:p>
             <a:pPr algn="ctr"/>
@@ -13009,7 +13092,7 @@
           </a:fontRef>
         </p:style>
         <p:txBody>
-          <a:bodyPr rtlCol="0" anchor="ctr" wrap="square" tIns="25400" bIns="25400"/>
+          <a:bodyPr rtlCol="0" anchor="ctr" wrap="square" tIns="25400" bIns="25400" lIns="38100" rIns="38100"/>
           <a:lstStyle/>
           <a:p>
             <a:pPr algn="ctr"/>
@@ -13236,7 +13319,7 @@
         <p:spPr>
           <a:xfrm>
             <a:off x="457200" y="4846320"/>
-            <a:ext cx="1481328" cy="1097280"/>
+            <a:ext cx="1554480" cy="1097280"/>
           </a:xfrm>
           <a:prstGeom prst="roundRect">
             <a:avLst/>
@@ -13266,7 +13349,7 @@
           </a:fontRef>
         </p:style>
         <p:txBody>
-          <a:bodyPr rtlCol="0" anchor="ctr" wrap="square" tIns="25400" bIns="25400"/>
+          <a:bodyPr rtlCol="0" anchor="ctr" wrap="square" tIns="25400" bIns="25400" lIns="38100" rIns="38100"/>
           <a:lstStyle/>
           <a:p>
             <a:pPr algn="ctr"/>
@@ -13278,20 +13361,20 @@
                 <a:latin typeface="PingFang TC"/>
                 <a:ea typeface="PingFang TC"/>
               </a:rPr>
+              <a:t>手動觸發</a:t>
+            </a:r>
+          </a:p>
+          <a:p>
+            <a:pPr algn="ctr"/>
+            <a:r>
+              <a:rPr sz="1100" b="0">
+                <a:solidFill>
+                  <a:srgbClr val="FFFFFF"/>
+                </a:solidFill>
+                <a:latin typeface="PingFang TC"/>
+                <a:ea typeface="PingFang TC"/>
+              </a:rPr>
               <a:t>workflow_dispatch</a:t>
-            </a:r>
-          </a:p>
-          <a:p>
-            <a:pPr algn="ctr"/>
-            <a:r>
-              <a:rPr sz="1100" b="0">
-                <a:solidFill>
-                  <a:srgbClr val="FFFFFF"/>
-                </a:solidFill>
-                <a:latin typeface="PingFang TC"/>
-                <a:ea typeface="PingFang TC"/>
-              </a:rPr>
-              <a:t>手動觸發</a:t>
             </a:r>
           </a:p>
           <a:p>
@@ -13317,8 +13400,8 @@
         </p:nvCxnSpPr>
         <p:spPr>
           <a:xfrm>
-            <a:off x="1938528" y="5394960"/>
-            <a:ext cx="118872" cy="0"/>
+            <a:off x="2011680" y="5394960"/>
+            <a:ext cx="91440" cy="0"/>
           </a:xfrm>
           <a:prstGeom prst="line">
             <a:avLst/>
@@ -13353,8 +13436,8 @@
         </p:nvSpPr>
         <p:spPr>
           <a:xfrm>
-            <a:off x="2057400" y="4846320"/>
-            <a:ext cx="1481328" cy="1097280"/>
+            <a:off x="2103120" y="4846320"/>
+            <a:ext cx="1554480" cy="1097280"/>
           </a:xfrm>
           <a:prstGeom prst="roundRect">
             <a:avLst/>
@@ -13384,7 +13467,7 @@
           </a:fontRef>
         </p:style>
         <p:txBody>
-          <a:bodyPr rtlCol="0" anchor="ctr" wrap="square" tIns="25400" bIns="25400"/>
+          <a:bodyPr rtlCol="0" anchor="ctr" wrap="square" tIns="25400" bIns="25400" lIns="38100" rIns="38100"/>
           <a:lstStyle/>
           <a:p>
             <a:pPr algn="ctr"/>
@@ -13435,8 +13518,8 @@
         </p:nvCxnSpPr>
         <p:spPr>
           <a:xfrm>
-            <a:off x="3538728" y="5394960"/>
-            <a:ext cx="118872" cy="0"/>
+            <a:off x="3657600" y="5394960"/>
+            <a:ext cx="91440" cy="0"/>
           </a:xfrm>
           <a:prstGeom prst="line">
             <a:avLst/>
@@ -13471,8 +13554,8 @@
         </p:nvSpPr>
         <p:spPr>
           <a:xfrm>
-            <a:off x="3657600" y="4846320"/>
-            <a:ext cx="1481328" cy="1097280"/>
+            <a:off x="3749040" y="4846320"/>
+            <a:ext cx="1554480" cy="1097280"/>
           </a:xfrm>
           <a:prstGeom prst="roundRect">
             <a:avLst/>
@@ -13502,7 +13585,7 @@
           </a:fontRef>
         </p:style>
         <p:txBody>
-          <a:bodyPr rtlCol="0" anchor="ctr" wrap="square" tIns="25400" bIns="25400"/>
+          <a:bodyPr rtlCol="0" anchor="ctr" wrap="square" tIns="25400" bIns="25400" lIns="38100" rIns="38100"/>
           <a:lstStyle/>
           <a:p>
             <a:pPr algn="ctr"/>
@@ -13553,8 +13636,8 @@
         </p:nvCxnSpPr>
         <p:spPr>
           <a:xfrm>
-            <a:off x="5138928" y="5394960"/>
-            <a:ext cx="118872" cy="0"/>
+            <a:off x="5303520" y="5394960"/>
+            <a:ext cx="91440" cy="0"/>
           </a:xfrm>
           <a:prstGeom prst="line">
             <a:avLst/>
@@ -13589,8 +13672,8 @@
         </p:nvSpPr>
         <p:spPr>
           <a:xfrm>
-            <a:off x="5257800" y="4846320"/>
-            <a:ext cx="1481328" cy="1097280"/>
+            <a:off x="5394960" y="4846320"/>
+            <a:ext cx="1554480" cy="1097280"/>
           </a:xfrm>
           <a:prstGeom prst="roundRect">
             <a:avLst/>
@@ -13620,7 +13703,7 @@
           </a:fontRef>
         </p:style>
         <p:txBody>
-          <a:bodyPr rtlCol="0" anchor="ctr" wrap="square" tIns="25400" bIns="25400"/>
+          <a:bodyPr rtlCol="0" anchor="ctr" wrap="square" tIns="25400" bIns="25400" lIns="38100" rIns="38100"/>
           <a:lstStyle/>
           <a:p>
             <a:pPr algn="ctr"/>
@@ -13671,8 +13754,8 @@
         </p:nvCxnSpPr>
         <p:spPr>
           <a:xfrm>
-            <a:off x="6739128" y="5394960"/>
-            <a:ext cx="118872" cy="0"/>
+            <a:off x="6949440" y="5394960"/>
+            <a:ext cx="91440" cy="0"/>
           </a:xfrm>
           <a:prstGeom prst="line">
             <a:avLst/>
@@ -13707,8 +13790,8 @@
         </p:nvSpPr>
         <p:spPr>
           <a:xfrm>
-            <a:off x="6858000" y="4846320"/>
-            <a:ext cx="1481328" cy="1097280"/>
+            <a:off x="7040880" y="4846320"/>
+            <a:ext cx="1554480" cy="1097280"/>
           </a:xfrm>
           <a:prstGeom prst="roundRect">
             <a:avLst/>
@@ -13738,7 +13821,7 @@
           </a:fontRef>
         </p:style>
         <p:txBody>
-          <a:bodyPr rtlCol="0" anchor="ctr" wrap="square" tIns="25400" bIns="25400"/>
+          <a:bodyPr rtlCol="0" anchor="ctr" wrap="square" tIns="25400" bIns="25400" lIns="38100" rIns="38100"/>
           <a:lstStyle/>
           <a:p>
             <a:pPr algn="ctr"/>
@@ -13789,8 +13872,8 @@
         </p:nvCxnSpPr>
         <p:spPr>
           <a:xfrm>
-            <a:off x="8339328" y="5394960"/>
-            <a:ext cx="118872" cy="0"/>
+            <a:off x="8595360" y="5394960"/>
+            <a:ext cx="91440" cy="0"/>
           </a:xfrm>
           <a:prstGeom prst="line">
             <a:avLst/>
@@ -13825,8 +13908,8 @@
         </p:nvSpPr>
         <p:spPr>
           <a:xfrm>
-            <a:off x="8458200" y="4846320"/>
-            <a:ext cx="1481328" cy="1097280"/>
+            <a:off x="8686800" y="4846320"/>
+            <a:ext cx="1554480" cy="1097280"/>
           </a:xfrm>
           <a:prstGeom prst="roundRect">
             <a:avLst/>
@@ -13856,7 +13939,7 @@
           </a:fontRef>
         </p:style>
         <p:txBody>
-          <a:bodyPr rtlCol="0" anchor="ctr" wrap="square" tIns="25400" bIns="25400"/>
+          <a:bodyPr rtlCol="0" anchor="ctr" wrap="square" tIns="25400" bIns="25400" lIns="38100" rIns="38100"/>
           <a:lstStyle/>
           <a:p>
             <a:pPr algn="ctr"/>
@@ -13907,8 +13990,8 @@
         </p:nvCxnSpPr>
         <p:spPr>
           <a:xfrm>
-            <a:off x="9939528" y="5394960"/>
-            <a:ext cx="118872" cy="0"/>
+            <a:off x="10241280" y="5394960"/>
+            <a:ext cx="91440" cy="0"/>
           </a:xfrm>
           <a:prstGeom prst="line">
             <a:avLst/>
@@ -13943,8 +14026,8 @@
         </p:nvSpPr>
         <p:spPr>
           <a:xfrm>
-            <a:off x="10058400" y="4846320"/>
-            <a:ext cx="1481328" cy="1097280"/>
+            <a:off x="10332720" y="4846320"/>
+            <a:ext cx="1554480" cy="1097280"/>
           </a:xfrm>
           <a:prstGeom prst="roundRect">
             <a:avLst/>
@@ -13974,7 +14057,7 @@
           </a:fontRef>
         </p:style>
         <p:txBody>
-          <a:bodyPr rtlCol="0" anchor="ctr" wrap="square" tIns="25400" bIns="25400"/>
+          <a:bodyPr rtlCol="0" anchor="ctr" wrap="square" tIns="25400" bIns="25400" lIns="38100" rIns="38100"/>
           <a:lstStyle/>
           <a:p>
             <a:pPr algn="ctr"/>
@@ -14215,7 +14298,7 @@
           </a:fontRef>
         </p:style>
         <p:txBody>
-          <a:bodyPr rtlCol="0" anchor="ctr" wrap="square" tIns="25400" bIns="25400"/>
+          <a:bodyPr rtlCol="0" anchor="ctr" wrap="square" tIns="25400" bIns="25400" lIns="38100" rIns="38100"/>
           <a:lstStyle/>
           <a:p>
             <a:pPr algn="ctr"/>
@@ -14582,7 +14665,7 @@
           </a:fontRef>
         </p:style>
         <p:txBody>
-          <a:bodyPr rtlCol="0" anchor="ctr" wrap="square" tIns="25400" bIns="25400"/>
+          <a:bodyPr rtlCol="0" anchor="ctr" wrap="square" tIns="25400" bIns="25400" lIns="38100" rIns="38100"/>
           <a:lstStyle/>
           <a:p>
             <a:pPr algn="ctr"/>
@@ -14775,7 +14858,7 @@
           </a:fontRef>
         </p:style>
         <p:txBody>
-          <a:bodyPr rtlCol="0" anchor="ctr" wrap="square" tIns="25400" bIns="25400"/>
+          <a:bodyPr rtlCol="0" anchor="ctr" wrap="square" tIns="25400" bIns="25400" lIns="38100" rIns="38100"/>
           <a:lstStyle/>
           <a:p>
             <a:pPr algn="ctr"/>
@@ -15064,7 +15147,7 @@
           </a:fontRef>
         </p:style>
         <p:txBody>
-          <a:bodyPr rtlCol="0" anchor="ctr" wrap="square" tIns="25400" bIns="25400"/>
+          <a:bodyPr rtlCol="0" anchor="ctr" wrap="square" tIns="25400" bIns="25400" lIns="38100" rIns="38100"/>
           <a:lstStyle/>
           <a:p>
             <a:pPr algn="ctr"/>
@@ -15240,7 +15323,7 @@
           </a:fontRef>
         </p:style>
         <p:txBody>
-          <a:bodyPr rtlCol="0" anchor="ctr" wrap="square" tIns="25400" bIns="25400"/>
+          <a:bodyPr rtlCol="0" anchor="ctr" wrap="square" tIns="25400" bIns="25400" lIns="38100" rIns="38100"/>
           <a:lstStyle/>
           <a:p>
             <a:pPr algn="ctr"/>
@@ -15433,7 +15516,7 @@
           </a:fontRef>
         </p:style>
         <p:txBody>
-          <a:bodyPr rtlCol="0" anchor="ctr" wrap="square" tIns="25400" bIns="25400"/>
+          <a:bodyPr rtlCol="0" anchor="ctr" wrap="square" tIns="25400" bIns="25400" lIns="38100" rIns="38100"/>
           <a:lstStyle/>
           <a:p>
             <a:pPr algn="ctr"/>
@@ -17219,7 +17302,7 @@
           </a:fontRef>
         </p:style>
         <p:txBody>
-          <a:bodyPr rtlCol="0" anchor="ctr" wrap="square" tIns="25400" bIns="25400"/>
+          <a:bodyPr rtlCol="0" anchor="ctr" wrap="square" tIns="25400" bIns="25400" lIns="38100" rIns="38100"/>
           <a:lstStyle/>
           <a:p>
             <a:pPr algn="ctr"/>
@@ -17332,7 +17415,7 @@
           </a:fontRef>
         </p:style>
         <p:txBody>
-          <a:bodyPr rtlCol="0" anchor="ctr" wrap="square" tIns="25400" bIns="25400"/>
+          <a:bodyPr rtlCol="0" anchor="ctr" wrap="square" tIns="25400" bIns="25400" lIns="38100" rIns="38100"/>
           <a:lstStyle/>
           <a:p>
             <a:pPr algn="ctr"/>
@@ -17445,7 +17528,7 @@
           </a:fontRef>
         </p:style>
         <p:txBody>
-          <a:bodyPr rtlCol="0" anchor="ctr" wrap="square" tIns="25400" bIns="25400"/>
+          <a:bodyPr rtlCol="0" anchor="ctr" wrap="square" tIns="25400" bIns="25400" lIns="38100" rIns="38100"/>
           <a:lstStyle/>
           <a:p>
             <a:pPr algn="ctr"/>
@@ -17558,7 +17641,7 @@
           </a:fontRef>
         </p:style>
         <p:txBody>
-          <a:bodyPr rtlCol="0" anchor="ctr" wrap="square" tIns="25400" bIns="25400"/>
+          <a:bodyPr rtlCol="0" anchor="ctr" wrap="square" tIns="25400" bIns="25400" lIns="38100" rIns="38100"/>
           <a:lstStyle/>
           <a:p>
             <a:pPr algn="ctr"/>
@@ -17671,7 +17754,7 @@
           </a:fontRef>
         </p:style>
         <p:txBody>
-          <a:bodyPr rtlCol="0" anchor="ctr" wrap="square" tIns="25400" bIns="25400"/>
+          <a:bodyPr rtlCol="0" anchor="ctr" wrap="square" tIns="25400" bIns="25400" lIns="38100" rIns="38100"/>
           <a:lstStyle/>
           <a:p>
             <a:pPr algn="ctr"/>
@@ -17784,7 +17867,7 @@
           </a:fontRef>
         </p:style>
         <p:txBody>
-          <a:bodyPr rtlCol="0" anchor="ctr" wrap="square" tIns="25400" bIns="25400"/>
+          <a:bodyPr rtlCol="0" anchor="ctr" wrap="square" tIns="25400" bIns="25400" lIns="38100" rIns="38100"/>
           <a:lstStyle/>
           <a:p>
             <a:pPr algn="ctr"/>
@@ -17897,7 +17980,7 @@
           </a:fontRef>
         </p:style>
         <p:txBody>
-          <a:bodyPr rtlCol="0" anchor="ctr" wrap="square" tIns="25400" bIns="25400"/>
+          <a:bodyPr rtlCol="0" anchor="ctr" wrap="square" tIns="25400" bIns="25400" lIns="38100" rIns="38100"/>
           <a:lstStyle/>
           <a:p>
             <a:pPr algn="ctr"/>
@@ -18010,7 +18093,7 @@
           </a:fontRef>
         </p:style>
         <p:txBody>
-          <a:bodyPr rtlCol="0" anchor="ctr" wrap="square" tIns="25400" bIns="25400"/>
+          <a:bodyPr rtlCol="0" anchor="ctr" wrap="square" tIns="25400" bIns="25400" lIns="38100" rIns="38100"/>
           <a:lstStyle/>
           <a:p>
             <a:pPr algn="ctr"/>
@@ -18123,7 +18206,7 @@
           </a:fontRef>
         </p:style>
         <p:txBody>
-          <a:bodyPr rtlCol="0" anchor="ctr" wrap="square" tIns="25400" bIns="25400"/>
+          <a:bodyPr rtlCol="0" anchor="ctr" wrap="square" tIns="25400" bIns="25400" lIns="38100" rIns="38100"/>
           <a:lstStyle/>
           <a:p>
             <a:pPr algn="ctr"/>
@@ -18236,7 +18319,7 @@
           </a:fontRef>
         </p:style>
         <p:txBody>
-          <a:bodyPr rtlCol="0" anchor="ctr" wrap="square" tIns="25400" bIns="25400"/>
+          <a:bodyPr rtlCol="0" anchor="ctr" wrap="square" tIns="25400" bIns="25400" lIns="38100" rIns="38100"/>
           <a:lstStyle/>
           <a:p>
             <a:pPr algn="ctr"/>
@@ -18349,7 +18432,7 @@
           </a:fontRef>
         </p:style>
         <p:txBody>
-          <a:bodyPr rtlCol="0" anchor="ctr" wrap="square" tIns="25400" bIns="25400"/>
+          <a:bodyPr rtlCol="0" anchor="ctr" wrap="square" tIns="25400" bIns="25400" lIns="38100" rIns="38100"/>
           <a:lstStyle/>
           <a:p>
             <a:pPr algn="ctr"/>
@@ -18462,7 +18545,7 @@
           </a:fontRef>
         </p:style>
         <p:txBody>
-          <a:bodyPr rtlCol="0" anchor="ctr" wrap="square" tIns="25400" bIns="25400"/>
+          <a:bodyPr rtlCol="0" anchor="ctr" wrap="square" tIns="25400" bIns="25400" lIns="38100" rIns="38100"/>
           <a:lstStyle/>
           <a:p>
             <a:pPr algn="ctr"/>
@@ -18575,7 +18658,7 @@
           </a:fontRef>
         </p:style>
         <p:txBody>
-          <a:bodyPr rtlCol="0" anchor="ctr" wrap="square" tIns="25400" bIns="25400"/>
+          <a:bodyPr rtlCol="0" anchor="ctr" wrap="square" tIns="25400" bIns="25400" lIns="38100" rIns="38100"/>
           <a:lstStyle/>
           <a:p>
             <a:pPr algn="ctr"/>
@@ -20559,7 +20642,7 @@
           </a:fontRef>
         </p:style>
         <p:txBody>
-          <a:bodyPr rtlCol="0" anchor="ctr" wrap="square" tIns="25400" bIns="25400"/>
+          <a:bodyPr rtlCol="0" anchor="ctr" wrap="square" tIns="25400" bIns="25400" lIns="38100" rIns="38100"/>
           <a:lstStyle/>
           <a:p>
             <a:pPr algn="ctr"/>
@@ -20628,7 +20711,7 @@
           </a:fontRef>
         </p:style>
         <p:txBody>
-          <a:bodyPr rtlCol="0" anchor="ctr" wrap="square" tIns="25400" bIns="25400"/>
+          <a:bodyPr rtlCol="0" anchor="ctr" wrap="square" tIns="25400" bIns="25400" lIns="38100" rIns="38100"/>
           <a:lstStyle/>
           <a:p>
             <a:pPr algn="ctr"/>
@@ -20697,7 +20780,7 @@
           </a:fontRef>
         </p:style>
         <p:txBody>
-          <a:bodyPr rtlCol="0" anchor="ctr" wrap="square" tIns="25400" bIns="25400"/>
+          <a:bodyPr rtlCol="0" anchor="ctr" wrap="square" tIns="25400" bIns="25400" lIns="38100" rIns="38100"/>
           <a:lstStyle/>
           <a:p>
             <a:pPr algn="ctr"/>
@@ -20779,7 +20862,7 @@
           </a:fontRef>
         </p:style>
         <p:txBody>
-          <a:bodyPr rtlCol="0" anchor="ctr" wrap="square" tIns="25400" bIns="25400"/>
+          <a:bodyPr rtlCol="0" anchor="ctr" wrap="square" tIns="25400" bIns="25400" lIns="38100" rIns="38100"/>
           <a:lstStyle/>
           <a:p>
             <a:pPr algn="ctr"/>
@@ -20861,7 +20944,7 @@
           </a:fontRef>
         </p:style>
         <p:txBody>
-          <a:bodyPr rtlCol="0" anchor="ctr" wrap="square" tIns="25400" bIns="25400"/>
+          <a:bodyPr rtlCol="0" anchor="ctr" wrap="square" tIns="25400" bIns="25400" lIns="38100" rIns="38100"/>
           <a:lstStyle/>
           <a:p>
             <a:pPr algn="ctr"/>
@@ -21019,9 +21102,79 @@
           <p:nvPr/>
         </p:nvCxnSpPr>
         <p:spPr>
-          <a:xfrm>
-            <a:off x="5943600" y="2057400"/>
-            <a:ext cx="3017520" cy="0"/>
+          <a:xfrm flipV="1">
+            <a:off x="5760720" y="1371600"/>
+            <a:ext cx="0" cy="137160"/>
+          </a:xfrm>
+          <a:prstGeom prst="line">
+            <a:avLst/>
+          </a:prstGeom>
+          <a:ln w="15240">
+            <a:solidFill>
+              <a:srgbClr val="059669"/>
+            </a:solidFill>
+          </a:ln>
+        </p:spPr>
+        <p:style>
+          <a:lnRef idx="2">
+            <a:schemeClr val="accent1"/>
+          </a:lnRef>
+          <a:fillRef idx="0">
+            <a:schemeClr val="accent1"/>
+          </a:fillRef>
+          <a:effectRef idx="1">
+            <a:schemeClr val="accent1"/>
+          </a:effectRef>
+          <a:fontRef idx="minor">
+            <a:schemeClr val="tx1"/>
+          </a:fontRef>
+        </p:style>
+      </p:cxnSp>
+      <p:cxnSp>
+        <p:nvCxnSpPr>
+          <p:cNvPr id="13" name="Connector 12"/>
+          <p:cNvCxnSpPr/>
+          <p:nvPr/>
+        </p:nvCxnSpPr>
+        <p:spPr>
+          <a:xfrm>
+            <a:off x="5760720" y="1371600"/>
+            <a:ext cx="4572000" cy="0"/>
+          </a:xfrm>
+          <a:prstGeom prst="line">
+            <a:avLst/>
+          </a:prstGeom>
+          <a:ln w="15240">
+            <a:solidFill>
+              <a:srgbClr val="059669"/>
+            </a:solidFill>
+          </a:ln>
+        </p:spPr>
+        <p:style>
+          <a:lnRef idx="2">
+            <a:schemeClr val="accent1"/>
+          </a:lnRef>
+          <a:fillRef idx="0">
+            <a:schemeClr val="accent1"/>
+          </a:fillRef>
+          <a:effectRef idx="1">
+            <a:schemeClr val="accent1"/>
+          </a:effectRef>
+          <a:fontRef idx="minor">
+            <a:schemeClr val="tx1"/>
+          </a:fontRef>
+        </p:style>
+      </p:cxnSp>
+      <p:cxnSp>
+        <p:nvCxnSpPr>
+          <p:cNvPr id="14" name="Connector 13"/>
+          <p:cNvCxnSpPr/>
+          <p:nvPr/>
+        </p:nvCxnSpPr>
+        <p:spPr>
+          <a:xfrm>
+            <a:off x="10332720" y="1371600"/>
+            <a:ext cx="0" cy="137160"/>
           </a:xfrm>
           <a:prstGeom prst="line">
             <a:avLst/>
@@ -21050,7 +21203,7 @@
       </p:cxnSp>
       <p:sp>
         <p:nvSpPr>
-          <p:cNvPr id="13" name="Rounded Rectangle 12"/>
+          <p:cNvPr id="15" name="Rounded Rectangle 14"/>
           <p:cNvSpPr/>
           <p:nvPr/>
         </p:nvSpPr>
@@ -21087,7 +21240,7 @@
           </a:fontRef>
         </p:style>
         <p:txBody>
-          <a:bodyPr rtlCol="0" anchor="ctr" wrap="square" tIns="25400" bIns="25400"/>
+          <a:bodyPr rtlCol="0" anchor="ctr" wrap="square" tIns="25400" bIns="25400" lIns="38100" rIns="38100"/>
           <a:lstStyle/>
           <a:p>
             <a:pPr algn="ctr"/>
@@ -21119,7 +21272,7 @@
       </p:sp>
       <p:sp>
         <p:nvSpPr>
-          <p:cNvPr id="14" name="Rounded Rectangle 13"/>
+          <p:cNvPr id="16" name="Rounded Rectangle 15"/>
           <p:cNvSpPr/>
           <p:nvPr/>
         </p:nvSpPr>
@@ -21156,7 +21309,7 @@
           </a:fontRef>
         </p:style>
         <p:txBody>
-          <a:bodyPr rtlCol="0" anchor="ctr" wrap="square" tIns="25400" bIns="25400"/>
+          <a:bodyPr rtlCol="0" anchor="ctr" wrap="square" tIns="25400" bIns="25400" lIns="38100" rIns="38100"/>
           <a:lstStyle/>
           <a:p>
             <a:pPr algn="ctr"/>
@@ -21188,7 +21341,7 @@
       </p:sp>
       <p:sp>
         <p:nvSpPr>
-          <p:cNvPr id="15" name="Rounded Rectangle 14"/>
+          <p:cNvPr id="17" name="Rounded Rectangle 16"/>
           <p:cNvSpPr/>
           <p:nvPr/>
         </p:nvSpPr>
@@ -21225,7 +21378,7 @@
           </a:fontRef>
         </p:style>
         <p:txBody>
-          <a:bodyPr rtlCol="0" anchor="ctr" wrap="square" tIns="25400" bIns="25400"/>
+          <a:bodyPr rtlCol="0" anchor="ctr" wrap="square" tIns="25400" bIns="25400" lIns="38100" rIns="38100"/>
           <a:lstStyle/>
           <a:p>
             <a:pPr algn="ctr"/>
@@ -21270,7 +21423,7 @@
       </p:sp>
       <p:sp>
         <p:nvSpPr>
-          <p:cNvPr id="16" name="Rounded Rectangle 15"/>
+          <p:cNvPr id="18" name="Rounded Rectangle 17"/>
           <p:cNvSpPr/>
           <p:nvPr/>
         </p:nvSpPr>
@@ -21307,7 +21460,7 @@
           </a:fontRef>
         </p:style>
         <p:txBody>
-          <a:bodyPr rtlCol="0" anchor="ctr" wrap="square" tIns="25400" bIns="25400"/>
+          <a:bodyPr rtlCol="0" anchor="ctr" wrap="square" tIns="25400" bIns="25400" lIns="38100" rIns="38100"/>
           <a:lstStyle/>
           <a:p>
             <a:pPr algn="ctr"/>
@@ -21337,78 +21490,6 @@
           </a:p>
         </p:txBody>
       </p:sp>
-      <p:cxnSp>
-        <p:nvCxnSpPr>
-          <p:cNvPr id="17" name="Connector 16"/>
-          <p:cNvCxnSpPr/>
-          <p:nvPr/>
-        </p:nvCxnSpPr>
-        <p:spPr>
-          <a:xfrm>
-            <a:off x="2011680" y="3154680"/>
-            <a:ext cx="274320" cy="0"/>
-          </a:xfrm>
-          <a:prstGeom prst="line">
-            <a:avLst/>
-          </a:prstGeom>
-          <a:ln w="22225">
-            <a:solidFill>
-              <a:srgbClr val="64748B"/>
-            </a:solidFill>
-            <a:tailEnd type="triangle" w="med" len="med"/>
-          </a:ln>
-        </p:spPr>
-        <p:style>
-          <a:lnRef idx="2">
-            <a:schemeClr val="accent1"/>
-          </a:lnRef>
-          <a:fillRef idx="0">
-            <a:schemeClr val="accent1"/>
-          </a:fillRef>
-          <a:effectRef idx="1">
-            <a:schemeClr val="accent1"/>
-          </a:effectRef>
-          <a:fontRef idx="minor">
-            <a:schemeClr val="tx1"/>
-          </a:fontRef>
-        </p:style>
-      </p:cxnSp>
-      <p:cxnSp>
-        <p:nvCxnSpPr>
-          <p:cNvPr id="18" name="Connector 17"/>
-          <p:cNvCxnSpPr/>
-          <p:nvPr/>
-        </p:nvCxnSpPr>
-        <p:spPr>
-          <a:xfrm>
-            <a:off x="3657600" y="3154680"/>
-            <a:ext cx="274320" cy="0"/>
-          </a:xfrm>
-          <a:prstGeom prst="line">
-            <a:avLst/>
-          </a:prstGeom>
-          <a:ln w="22225">
-            <a:solidFill>
-              <a:srgbClr val="64748B"/>
-            </a:solidFill>
-            <a:tailEnd type="triangle" w="med" len="med"/>
-          </a:ln>
-        </p:spPr>
-        <p:style>
-          <a:lnRef idx="2">
-            <a:schemeClr val="accent1"/>
-          </a:lnRef>
-          <a:fillRef idx="0">
-            <a:schemeClr val="accent1"/>
-          </a:fillRef>
-          <a:effectRef idx="1">
-            <a:schemeClr val="accent1"/>
-          </a:effectRef>
-          <a:fontRef idx="minor">
-            <a:schemeClr val="tx1"/>
-          </a:fontRef>
-        </p:style>
-      </p:cxnSp>
       <p:cxnSp>
         <p:nvCxnSpPr>
           <p:cNvPr id="19" name="Connector 18"/>
@@ -21417,8 +21498,8 @@
         </p:nvCxnSpPr>
         <p:spPr>
           <a:xfrm>
-            <a:off x="5943600" y="3154680"/>
-            <a:ext cx="457200" cy="0"/>
+            <a:off x="2011680" y="3154680"/>
+            <a:ext cx="274320" cy="0"/>
           </a:xfrm>
           <a:prstGeom prst="line">
             <a:avLst/>
@@ -21452,6 +21533,78 @@
           <p:nvPr/>
         </p:nvCxnSpPr>
         <p:spPr>
+          <a:xfrm>
+            <a:off x="3657600" y="3154680"/>
+            <a:ext cx="274320" cy="0"/>
+          </a:xfrm>
+          <a:prstGeom prst="line">
+            <a:avLst/>
+          </a:prstGeom>
+          <a:ln w="22225">
+            <a:solidFill>
+              <a:srgbClr val="64748B"/>
+            </a:solidFill>
+            <a:tailEnd type="triangle" w="med" len="med"/>
+          </a:ln>
+        </p:spPr>
+        <p:style>
+          <a:lnRef idx="2">
+            <a:schemeClr val="accent1"/>
+          </a:lnRef>
+          <a:fillRef idx="0">
+            <a:schemeClr val="accent1"/>
+          </a:fillRef>
+          <a:effectRef idx="1">
+            <a:schemeClr val="accent1"/>
+          </a:effectRef>
+          <a:fontRef idx="minor">
+            <a:schemeClr val="tx1"/>
+          </a:fontRef>
+        </p:style>
+      </p:cxnSp>
+      <p:cxnSp>
+        <p:nvCxnSpPr>
+          <p:cNvPr id="21" name="Connector 20"/>
+          <p:cNvCxnSpPr/>
+          <p:nvPr/>
+        </p:nvCxnSpPr>
+        <p:spPr>
+          <a:xfrm>
+            <a:off x="5943600" y="3154680"/>
+            <a:ext cx="457200" cy="0"/>
+          </a:xfrm>
+          <a:prstGeom prst="line">
+            <a:avLst/>
+          </a:prstGeom>
+          <a:ln w="22225">
+            <a:solidFill>
+              <a:srgbClr val="64748B"/>
+            </a:solidFill>
+            <a:tailEnd type="triangle" w="med" len="med"/>
+          </a:ln>
+        </p:spPr>
+        <p:style>
+          <a:lnRef idx="2">
+            <a:schemeClr val="accent1"/>
+          </a:lnRef>
+          <a:fillRef idx="0">
+            <a:schemeClr val="accent1"/>
+          </a:fillRef>
+          <a:effectRef idx="1">
+            <a:schemeClr val="accent1"/>
+          </a:effectRef>
+          <a:fontRef idx="minor">
+            <a:schemeClr val="tx1"/>
+          </a:fontRef>
+        </p:style>
+      </p:cxnSp>
+      <p:cxnSp>
+        <p:nvCxnSpPr>
+          <p:cNvPr id="22" name="Connector 21"/>
+          <p:cNvCxnSpPr/>
+          <p:nvPr/>
+        </p:nvCxnSpPr>
+        <p:spPr>
           <a:xfrm flipV="1">
             <a:off x="4937760" y="2240280"/>
             <a:ext cx="0" cy="548640"/>
@@ -21483,7 +21636,7 @@
       </p:cxnSp>
       <p:sp>
         <p:nvSpPr>
-          <p:cNvPr id="21" name="TextBox 20"/>
+          <p:cNvPr id="23" name="TextBox 22"/>
           <p:cNvSpPr txBox="1"/>
           <p:nvPr/>
         </p:nvSpPr>
@@ -21523,7 +21676,7 @@
       </p:sp>
       <p:cxnSp>
         <p:nvCxnSpPr>
-          <p:cNvPr id="22" name="Connector 21"/>
+          <p:cNvPr id="24" name="Connector 23"/>
           <p:cNvCxnSpPr/>
           <p:nvPr/>
         </p:nvCxnSpPr>
@@ -21559,7 +21712,7 @@
       </p:cxnSp>
       <p:sp>
         <p:nvSpPr>
-          <p:cNvPr id="23" name="TextBox 22"/>
+          <p:cNvPr id="25" name="TextBox 24"/>
           <p:cNvSpPr txBox="1"/>
           <p:nvPr/>
         </p:nvSpPr>
@@ -21599,7 +21752,7 @@
       </p:sp>
       <p:sp>
         <p:nvSpPr>
-          <p:cNvPr id="24" name="Rounded Rectangle 23"/>
+          <p:cNvPr id="26" name="Rounded Rectangle 25"/>
           <p:cNvSpPr/>
           <p:nvPr/>
         </p:nvSpPr>
@@ -21636,7 +21789,7 @@
           </a:fontRef>
         </p:style>
         <p:txBody>
-          <a:bodyPr rtlCol="0" anchor="ctr" wrap="square" tIns="25400" bIns="25400"/>
+          <a:bodyPr rtlCol="0" anchor="ctr" wrap="square" tIns="25400" bIns="25400" lIns="38100" rIns="38100"/>
           <a:lstStyle/>
           <a:p>
             <a:pPr algn="ctr"/>
@@ -21668,7 +21821,7 @@
       </p:sp>
       <p:sp>
         <p:nvSpPr>
-          <p:cNvPr id="25" name="Rounded Rectangle 24"/>
+          <p:cNvPr id="27" name="Rounded Rectangle 26"/>
           <p:cNvSpPr/>
           <p:nvPr/>
         </p:nvSpPr>
@@ -21705,7 +21858,7 @@
           </a:fontRef>
         </p:style>
         <p:txBody>
-          <a:bodyPr rtlCol="0" anchor="ctr" wrap="square" tIns="25400" bIns="25400"/>
+          <a:bodyPr rtlCol="0" anchor="ctr" wrap="square" tIns="25400" bIns="25400" lIns="38100" rIns="38100"/>
           <a:lstStyle/>
           <a:p>
             <a:pPr algn="ctr"/>
@@ -21737,7 +21890,7 @@
       </p:sp>
       <p:sp>
         <p:nvSpPr>
-          <p:cNvPr id="26" name="Rounded Rectangle 25"/>
+          <p:cNvPr id="28" name="Rounded Rectangle 27"/>
           <p:cNvSpPr/>
           <p:nvPr/>
         </p:nvSpPr>
@@ -21774,7 +21927,7 @@
           </a:fontRef>
         </p:style>
         <p:txBody>
-          <a:bodyPr rtlCol="0" anchor="ctr" wrap="square" tIns="25400" bIns="25400"/>
+          <a:bodyPr rtlCol="0" anchor="ctr" wrap="square" tIns="25400" bIns="25400" lIns="38100" rIns="38100"/>
           <a:lstStyle/>
           <a:p>
             <a:pPr algn="ctr"/>
@@ -21806,7 +21959,7 @@
       </p:sp>
       <p:sp>
         <p:nvSpPr>
-          <p:cNvPr id="27" name="Rounded Rectangle 26"/>
+          <p:cNvPr id="29" name="Rounded Rectangle 28"/>
           <p:cNvSpPr/>
           <p:nvPr/>
         </p:nvSpPr>
@@ -21843,7 +21996,7 @@
           </a:fontRef>
         </p:style>
         <p:txBody>
-          <a:bodyPr rtlCol="0" anchor="ctr" wrap="square" tIns="25400" bIns="25400"/>
+          <a:bodyPr rtlCol="0" anchor="ctr" wrap="square" tIns="25400" bIns="25400" lIns="38100" rIns="38100"/>
           <a:lstStyle/>
           <a:p>
             <a:pPr algn="ctr"/>
@@ -21875,7 +22028,7 @@
       </p:sp>
       <p:sp>
         <p:nvSpPr>
-          <p:cNvPr id="28" name="Rounded Rectangle 27"/>
+          <p:cNvPr id="30" name="Rounded Rectangle 29"/>
           <p:cNvSpPr/>
           <p:nvPr/>
         </p:nvSpPr>
@@ -21912,7 +22065,7 @@
           </a:fontRef>
         </p:style>
         <p:txBody>
-          <a:bodyPr rtlCol="0" anchor="ctr" wrap="square" tIns="25400" bIns="25400"/>
+          <a:bodyPr rtlCol="0" anchor="ctr" wrap="square" tIns="25400" bIns="25400" lIns="38100" rIns="38100"/>
           <a:lstStyle/>
           <a:p>
             <a:pPr algn="ctr"/>
@@ -21942,78 +22095,6 @@
           </a:p>
         </p:txBody>
       </p:sp>
-      <p:cxnSp>
-        <p:nvCxnSpPr>
-          <p:cNvPr id="29" name="Connector 28"/>
-          <p:cNvCxnSpPr/>
-          <p:nvPr/>
-        </p:nvCxnSpPr>
-        <p:spPr>
-          <a:xfrm>
-            <a:off x="10332720" y="2240280"/>
-            <a:ext cx="0" cy="1828800"/>
-          </a:xfrm>
-          <a:prstGeom prst="line">
-            <a:avLst/>
-          </a:prstGeom>
-          <a:ln w="22225">
-            <a:solidFill>
-              <a:srgbClr val="7C3AED"/>
-            </a:solidFill>
-            <a:tailEnd type="triangle" w="med" len="med"/>
-          </a:ln>
-        </p:spPr>
-        <p:style>
-          <a:lnRef idx="2">
-            <a:schemeClr val="accent1"/>
-          </a:lnRef>
-          <a:fillRef idx="0">
-            <a:schemeClr val="accent1"/>
-          </a:fillRef>
-          <a:effectRef idx="1">
-            <a:schemeClr val="accent1"/>
-          </a:effectRef>
-          <a:fontRef idx="minor">
-            <a:schemeClr val="tx1"/>
-          </a:fontRef>
-        </p:style>
-      </p:cxnSp>
-      <p:cxnSp>
-        <p:nvCxnSpPr>
-          <p:cNvPr id="30" name="Connector 29"/>
-          <p:cNvCxnSpPr/>
-          <p:nvPr/>
-        </p:nvCxnSpPr>
-        <p:spPr>
-          <a:xfrm flipH="1">
-            <a:off x="8503920" y="4434840"/>
-            <a:ext cx="457200" cy="0"/>
-          </a:xfrm>
-          <a:prstGeom prst="line">
-            <a:avLst/>
-          </a:prstGeom>
-          <a:ln w="22225">
-            <a:solidFill>
-              <a:srgbClr val="64748B"/>
-            </a:solidFill>
-            <a:tailEnd type="triangle" w="med" len="med"/>
-          </a:ln>
-        </p:spPr>
-        <p:style>
-          <a:lnRef idx="2">
-            <a:schemeClr val="accent1"/>
-          </a:lnRef>
-          <a:fillRef idx="0">
-            <a:schemeClr val="accent1"/>
-          </a:fillRef>
-          <a:effectRef idx="1">
-            <a:schemeClr val="accent1"/>
-          </a:effectRef>
-          <a:fontRef idx="minor">
-            <a:schemeClr val="tx1"/>
-          </a:fontRef>
-        </p:style>
-      </p:cxnSp>
       <p:cxnSp>
         <p:nvCxnSpPr>
           <p:cNvPr id="31" name="Connector 30"/>
@@ -22021,16 +22102,16 @@
           <p:nvPr/>
         </p:nvCxnSpPr>
         <p:spPr>
-          <a:xfrm flipH="1">
-            <a:off x="5943600" y="4434840"/>
-            <a:ext cx="457200" cy="0"/>
+          <a:xfrm>
+            <a:off x="10332720" y="2240280"/>
+            <a:ext cx="0" cy="1828800"/>
           </a:xfrm>
           <a:prstGeom prst="line">
             <a:avLst/>
           </a:prstGeom>
           <a:ln w="22225">
             <a:solidFill>
-              <a:srgbClr val="64748B"/>
+              <a:srgbClr val="7C3AED"/>
             </a:solidFill>
             <a:tailEnd type="triangle" w="med" len="med"/>
           </a:ln>
@@ -22058,8 +22139,8 @@
         </p:nvCxnSpPr>
         <p:spPr>
           <a:xfrm flipH="1">
-            <a:off x="3657600" y="4434840"/>
-            <a:ext cx="274320" cy="0"/>
+            <a:off x="8503920" y="4434840"/>
+            <a:ext cx="457200" cy="0"/>
           </a:xfrm>
           <a:prstGeom prst="line">
             <a:avLst/>
@@ -22094,8 +22175,8 @@
         </p:nvCxnSpPr>
         <p:spPr>
           <a:xfrm flipH="1">
-            <a:off x="2011680" y="4434840"/>
-            <a:ext cx="274320" cy="0"/>
+            <a:off x="5943600" y="4434840"/>
+            <a:ext cx="457200" cy="0"/>
           </a:xfrm>
           <a:prstGeom prst="line">
             <a:avLst/>
@@ -22122,9 +22203,81 @@
           </a:fontRef>
         </p:style>
       </p:cxnSp>
-      <p:sp>
-        <p:nvSpPr>
-          <p:cNvPr id="34" name="Rounded Rectangle 33"/>
+      <p:cxnSp>
+        <p:nvCxnSpPr>
+          <p:cNvPr id="34" name="Connector 33"/>
+          <p:cNvCxnSpPr/>
+          <p:nvPr/>
+        </p:nvCxnSpPr>
+        <p:spPr>
+          <a:xfrm flipH="1">
+            <a:off x="3657600" y="4434840"/>
+            <a:ext cx="274320" cy="0"/>
+          </a:xfrm>
+          <a:prstGeom prst="line">
+            <a:avLst/>
+          </a:prstGeom>
+          <a:ln w="22225">
+            <a:solidFill>
+              <a:srgbClr val="64748B"/>
+            </a:solidFill>
+            <a:tailEnd type="triangle" w="med" len="med"/>
+          </a:ln>
+        </p:spPr>
+        <p:style>
+          <a:lnRef idx="2">
+            <a:schemeClr val="accent1"/>
+          </a:lnRef>
+          <a:fillRef idx="0">
+            <a:schemeClr val="accent1"/>
+          </a:fillRef>
+          <a:effectRef idx="1">
+            <a:schemeClr val="accent1"/>
+          </a:effectRef>
+          <a:fontRef idx="minor">
+            <a:schemeClr val="tx1"/>
+          </a:fontRef>
+        </p:style>
+      </p:cxnSp>
+      <p:cxnSp>
+        <p:nvCxnSpPr>
+          <p:cNvPr id="35" name="Connector 34"/>
+          <p:cNvCxnSpPr/>
+          <p:nvPr/>
+        </p:nvCxnSpPr>
+        <p:spPr>
+          <a:xfrm flipH="1">
+            <a:off x="2011680" y="4434840"/>
+            <a:ext cx="274320" cy="0"/>
+          </a:xfrm>
+          <a:prstGeom prst="line">
+            <a:avLst/>
+          </a:prstGeom>
+          <a:ln w="22225">
+            <a:solidFill>
+              <a:srgbClr val="64748B"/>
+            </a:solidFill>
+            <a:tailEnd type="triangle" w="med" len="med"/>
+          </a:ln>
+        </p:spPr>
+        <p:style>
+          <a:lnRef idx="2">
+            <a:schemeClr val="accent1"/>
+          </a:lnRef>
+          <a:fillRef idx="0">
+            <a:schemeClr val="accent1"/>
+          </a:fillRef>
+          <a:effectRef idx="1">
+            <a:schemeClr val="accent1"/>
+          </a:effectRef>
+          <a:fontRef idx="minor">
+            <a:schemeClr val="tx1"/>
+          </a:fontRef>
+        </p:style>
+      </p:cxnSp>
+      <p:sp>
+        <p:nvSpPr>
+          <p:cNvPr id="36" name="Rounded Rectangle 35"/>
           <p:cNvSpPr/>
           <p:nvPr/>
         </p:nvSpPr>
@@ -22161,7 +22314,7 @@
           </a:fontRef>
         </p:style>
         <p:txBody>
-          <a:bodyPr rtlCol="0" anchor="ctr" wrap="square" tIns="25400" bIns="25400"/>
+          <a:bodyPr rtlCol="0" anchor="ctr" wrap="square" tIns="25400" bIns="25400" lIns="38100" rIns="38100"/>
           <a:lstStyle/>
           <a:p>
             <a:pPr algn="ctr"/>
@@ -22193,7 +22346,7 @@
       </p:sp>
       <p:sp>
         <p:nvSpPr>
-          <p:cNvPr id="35" name="Rounded Rectangle 34"/>
+          <p:cNvPr id="37" name="Rounded Rectangle 36"/>
           <p:cNvSpPr/>
           <p:nvPr/>
         </p:nvSpPr>
@@ -22230,7 +22383,7 @@
           </a:fontRef>
         </p:style>
         <p:txBody>
-          <a:bodyPr rtlCol="0" anchor="ctr" wrap="square" tIns="25400" bIns="25400"/>
+          <a:bodyPr rtlCol="0" anchor="ctr" wrap="square" tIns="25400" bIns="25400" lIns="38100" rIns="38100"/>
           <a:lstStyle/>
           <a:p>
             <a:pPr algn="ctr"/>
@@ -22262,7 +22415,7 @@
       </p:sp>
       <p:cxnSp>
         <p:nvCxnSpPr>
-          <p:cNvPr id="36" name="Connector 35"/>
+          <p:cNvPr id="38" name="Connector 37"/>
           <p:cNvCxnSpPr/>
           <p:nvPr/>
         </p:nvCxnSpPr>
@@ -22298,7 +22451,7 @@
       </p:cxnSp>
       <p:cxnSp>
         <p:nvCxnSpPr>
-          <p:cNvPr id="37" name="Connector 36"/>
+          <p:cNvPr id="39" name="Connector 38"/>
           <p:cNvCxnSpPr/>
           <p:nvPr/>
         </p:nvCxnSpPr>
@@ -22334,7 +22487,7 @@
       </p:cxnSp>
       <p:sp>
         <p:nvSpPr>
-          <p:cNvPr id="38" name="TextBox 37"/>
+          <p:cNvPr id="40" name="TextBox 39"/>
           <p:cNvSpPr txBox="1"/>
           <p:nvPr/>
         </p:nvSpPr>
@@ -22581,7 +22734,7 @@
           </a:fontRef>
         </p:style>
         <p:txBody>
-          <a:bodyPr rtlCol="0" anchor="ctr" wrap="square" tIns="25400" bIns="25400"/>
+          <a:bodyPr rtlCol="0" anchor="ctr" wrap="square" tIns="25400" bIns="25400" lIns="38100" rIns="38100"/>
           <a:lstStyle/>
           <a:p>
             <a:pPr algn="ctr"/>
@@ -22637,7 +22790,7 @@
           </a:fontRef>
         </p:style>
         <p:txBody>
-          <a:bodyPr rtlCol="0" anchor="ctr" wrap="square" tIns="25400" bIns="25400"/>
+          <a:bodyPr rtlCol="0" anchor="ctr" wrap="square" tIns="25400" bIns="25400" lIns="38100" rIns="38100"/>
           <a:lstStyle/>
           <a:p>
             <a:pPr algn="ctr"/>
@@ -22879,7 +23032,7 @@
           </a:fontRef>
         </p:style>
         <p:txBody>
-          <a:bodyPr rtlCol="0" anchor="ctr" wrap="square" tIns="25400" bIns="25400"/>
+          <a:bodyPr rtlCol="0" anchor="ctr" wrap="square" tIns="25400" bIns="25400" lIns="38100" rIns="38100"/>
           <a:lstStyle/>
           <a:p>
             <a:pPr algn="ctr"/>
@@ -22935,7 +23088,7 @@
           </a:fontRef>
         </p:style>
         <p:txBody>
-          <a:bodyPr rtlCol="0" anchor="ctr" wrap="square" tIns="25400" bIns="25400"/>
+          <a:bodyPr rtlCol="0" anchor="ctr" wrap="square" tIns="25400" bIns="25400" lIns="38100" rIns="38100"/>
           <a:lstStyle/>
           <a:p>
             <a:pPr algn="ctr"/>
@@ -23177,7 +23330,7 @@
           </a:fontRef>
         </p:style>
         <p:txBody>
-          <a:bodyPr rtlCol="0" anchor="ctr" wrap="square" tIns="25400" bIns="25400"/>
+          <a:bodyPr rtlCol="0" anchor="ctr" wrap="square" tIns="25400" bIns="25400" lIns="38100" rIns="38100"/>
           <a:lstStyle/>
           <a:p>
             <a:pPr algn="ctr"/>
@@ -23233,7 +23386,7 @@
           </a:fontRef>
         </p:style>
         <p:txBody>
-          <a:bodyPr rtlCol="0" anchor="ctr" wrap="square" tIns="25400" bIns="25400"/>
+          <a:bodyPr rtlCol="0" anchor="ctr" wrap="square" tIns="25400" bIns="25400" lIns="38100" rIns="38100"/>
           <a:lstStyle/>
           <a:p>
             <a:pPr algn="ctr"/>
@@ -23598,7 +23751,7 @@
           </a:fontRef>
         </p:style>
         <p:txBody>
-          <a:bodyPr rtlCol="0" anchor="ctr" wrap="square" tIns="25400" bIns="25400"/>
+          <a:bodyPr rtlCol="0" anchor="ctr" wrap="square" tIns="25400" bIns="25400" lIns="38100" rIns="38100"/>
           <a:lstStyle/>
           <a:p>
             <a:pPr algn="ctr"/>
@@ -23654,7 +23807,7 @@
           </a:fontRef>
         </p:style>
         <p:txBody>
-          <a:bodyPr rtlCol="0" anchor="ctr" wrap="square" tIns="25400" bIns="25400"/>
+          <a:bodyPr rtlCol="0" anchor="ctr" wrap="square" tIns="25400" bIns="25400" lIns="38100" rIns="38100"/>
           <a:lstStyle/>
           <a:p>
             <a:pPr algn="ctr"/>
@@ -23866,7 +24019,7 @@
           </a:fontRef>
         </p:style>
         <p:txBody>
-          <a:bodyPr rtlCol="0" anchor="ctr" wrap="square" tIns="25400" bIns="25400"/>
+          <a:bodyPr rtlCol="0" anchor="ctr" wrap="square" tIns="25400" bIns="25400" lIns="38100" rIns="38100"/>
           <a:lstStyle/>
           <a:p>
             <a:pPr algn="ctr"/>
@@ -23922,7 +24075,7 @@
           </a:fontRef>
         </p:style>
         <p:txBody>
-          <a:bodyPr rtlCol="0" anchor="ctr" wrap="square" tIns="25400" bIns="25400"/>
+          <a:bodyPr rtlCol="0" anchor="ctr" wrap="square" tIns="25400" bIns="25400" lIns="38100" rIns="38100"/>
           <a:lstStyle/>
           <a:p>
             <a:pPr algn="ctr"/>
@@ -24134,7 +24287,7 @@
           </a:fontRef>
         </p:style>
         <p:txBody>
-          <a:bodyPr rtlCol="0" anchor="ctr" wrap="square" tIns="25400" bIns="25400"/>
+          <a:bodyPr rtlCol="0" anchor="ctr" wrap="square" tIns="25400" bIns="25400" lIns="38100" rIns="38100"/>
           <a:lstStyle/>
           <a:p>
             <a:pPr algn="ctr"/>
@@ -24190,7 +24343,7 @@
           </a:fontRef>
         </p:style>
         <p:txBody>
-          <a:bodyPr rtlCol="0" anchor="ctr" wrap="square" tIns="25400" bIns="25400"/>
+          <a:bodyPr rtlCol="0" anchor="ctr" wrap="square" tIns="25400" bIns="25400" lIns="38100" rIns="38100"/>
           <a:lstStyle/>
           <a:p>
             <a:pPr algn="ctr"/>
@@ -24366,7 +24519,7 @@
           </a:fontRef>
         </p:style>
         <p:txBody>
-          <a:bodyPr rtlCol="0" anchor="ctr" wrap="square" tIns="25400" bIns="25400"/>
+          <a:bodyPr rtlCol="0" anchor="ctr" wrap="square" tIns="25400" bIns="25400" lIns="38100" rIns="38100"/>
           <a:lstStyle/>
           <a:p>
             <a:pPr algn="ctr"/>
@@ -24665,7 +24818,7 @@
                 </a:solidFill>
                 <a:latin typeface="Menlo"/>
               </a:rPr>
-              <a:t>rank     = score × age / interval      # 每 tick 取 due 商品排序取前 N</a:t>
+              <a:t>rank     = score × age / interval      # 每 tick 依 rank 取前 N</a:t>
             </a:r>
           </a:p>
         </p:txBody>
@@ -24869,7 +25022,7 @@
           </a:fontRef>
         </p:style>
         <p:txBody>
-          <a:bodyPr rtlCol="0" anchor="ctr" wrap="square" tIns="25400" bIns="25400"/>
+          <a:bodyPr rtlCol="0" anchor="ctr" wrap="square" tIns="25400" bIns="25400" lIns="38100" rIns="38100"/>
           <a:lstStyle/>
           <a:p>
             <a:pPr algn="ctr"/>
@@ -24987,7 +25140,7 @@
           </a:fontRef>
         </p:style>
         <p:txBody>
-          <a:bodyPr rtlCol="0" anchor="ctr" wrap="square" tIns="25400" bIns="25400"/>
+          <a:bodyPr rtlCol="0" anchor="ctr" wrap="square" tIns="25400" bIns="25400" lIns="38100" rIns="38100"/>
           <a:lstStyle/>
           <a:p>
             <a:pPr algn="ctr"/>
@@ -25105,7 +25258,7 @@
           </a:fontRef>
         </p:style>
         <p:txBody>
-          <a:bodyPr rtlCol="0" anchor="ctr" wrap="square" tIns="25400" bIns="25400"/>
+          <a:bodyPr rtlCol="0" anchor="ctr" wrap="square" tIns="25400" bIns="25400" lIns="38100" rIns="38100"/>
           <a:lstStyle/>
           <a:p>
             <a:pPr algn="ctr"/>
@@ -25223,7 +25376,7 @@
           </a:fontRef>
         </p:style>
         <p:txBody>
-          <a:bodyPr rtlCol="0" anchor="ctr" wrap="square" tIns="25400" bIns="25400"/>
+          <a:bodyPr rtlCol="0" anchor="ctr" wrap="square" tIns="25400" bIns="25400" lIns="38100" rIns="38100"/>
           <a:lstStyle/>
           <a:p>
             <a:pPr algn="ctr"/>
@@ -25305,7 +25458,7 @@
           </a:fontRef>
         </p:style>
         <p:txBody>
-          <a:bodyPr rtlCol="0" anchor="ctr" wrap="square" tIns="25400" bIns="25400"/>
+          <a:bodyPr rtlCol="0" anchor="ctr" wrap="square" tIns="25400" bIns="25400" lIns="38100" rIns="38100"/>
           <a:lstStyle/>
           <a:p>
             <a:pPr algn="ctr"/>
@@ -25569,7 +25722,7 @@
           </a:fontRef>
         </p:style>
         <p:txBody>
-          <a:bodyPr rtlCol="0" anchor="ctr" wrap="square" tIns="25400" bIns="25400"/>
+          <a:bodyPr rtlCol="0" anchor="ctr" wrap="square" tIns="25400" bIns="25400" lIns="38100" rIns="38100"/>
           <a:lstStyle/>
           <a:p>
             <a:pPr algn="ctr"/>
@@ -25638,7 +25791,7 @@
           </a:fontRef>
         </p:style>
         <p:txBody>
-          <a:bodyPr rtlCol="0" anchor="ctr" wrap="square" tIns="25400" bIns="25400"/>
+          <a:bodyPr rtlCol="0" anchor="ctr" wrap="square" tIns="25400" bIns="25400" lIns="38100" rIns="38100"/>
           <a:lstStyle/>
           <a:p>
             <a:pPr algn="ctr"/>
@@ -25743,7 +25896,7 @@
           </a:fontRef>
         </p:style>
         <p:txBody>
-          <a:bodyPr rtlCol="0" anchor="ctr" wrap="square" tIns="25400" bIns="25400"/>
+          <a:bodyPr rtlCol="0" anchor="ctr" wrap="square" tIns="25400" bIns="25400" lIns="38100" rIns="38100"/>
           <a:lstStyle/>
           <a:p>
             <a:pPr algn="ctr"/>
@@ -25861,7 +26014,7 @@
           </a:fontRef>
         </p:style>
         <p:txBody>
-          <a:bodyPr rtlCol="0" anchor="ctr" wrap="square" tIns="25400" bIns="25400"/>
+          <a:bodyPr rtlCol="0" anchor="ctr" wrap="square" tIns="25400" bIns="25400" lIns="38100" rIns="38100"/>
           <a:lstStyle/>
           <a:p>
             <a:pPr algn="ctr"/>
@@ -25966,7 +26119,7 @@
           </a:fontRef>
         </p:style>
         <p:txBody>
-          <a:bodyPr rtlCol="0" anchor="ctr" wrap="square" tIns="25400" bIns="25400"/>
+          <a:bodyPr rtlCol="0" anchor="ctr" wrap="square" tIns="25400" bIns="25400" lIns="38100" rIns="38100"/>
           <a:lstStyle/>
           <a:p>
             <a:pPr algn="ctr"/>
@@ -26071,7 +26224,7 @@
           </a:fontRef>
         </p:style>
         <p:txBody>
-          <a:bodyPr rtlCol="0" anchor="ctr" wrap="square" tIns="25400" bIns="25400"/>
+          <a:bodyPr rtlCol="0" anchor="ctr" wrap="square" tIns="25400" bIns="25400" lIns="38100" rIns="38100"/>
           <a:lstStyle/>
           <a:p>
             <a:pPr algn="ctr"/>
@@ -26176,7 +26329,7 @@
           </a:fontRef>
         </p:style>
         <p:txBody>
-          <a:bodyPr rtlCol="0" anchor="ctr" wrap="square" tIns="25400" bIns="25400"/>
+          <a:bodyPr rtlCol="0" anchor="ctr" wrap="square" tIns="25400" bIns="25400" lIns="38100" rIns="38100"/>
           <a:lstStyle/>
           <a:p>
             <a:pPr algn="ctr"/>
@@ -26232,7 +26385,7 @@
           </a:fontRef>
         </p:style>
         <p:txBody>
-          <a:bodyPr rtlCol="0" anchor="ctr" wrap="square" tIns="25400" bIns="25400"/>
+          <a:bodyPr rtlCol="0" anchor="ctr" wrap="square" tIns="25400" bIns="25400" lIns="38100" rIns="38100"/>
           <a:lstStyle/>
           <a:p>
             <a:pPr algn="ctr"/>
@@ -26360,7 +26513,7 @@
           </a:fontRef>
         </p:style>
         <p:txBody>
-          <a:bodyPr rtlCol="0" anchor="ctr" wrap="square" tIns="25400" bIns="25400"/>
+          <a:bodyPr rtlCol="0" anchor="ctr" wrap="square" tIns="25400" bIns="25400" lIns="38100" rIns="38100"/>
           <a:lstStyle/>
           <a:p>
             <a:pPr algn="ctr"/>
